--- a/nuris_prototype/outputs/NURIS_presentation.pptx
+++ b/nuris_prototype/outputs/NURIS_presentation.pptx
@@ -5,17 +5,17 @@
     <p:sldMasterId id="2147483648" r:id="rId1"/>
   </p:sldMasterIdLst>
   <p:sldIdLst>
-    <p:sldId id="256" r:id="rId7"/>
-    <p:sldId id="257" r:id="rId8"/>
-    <p:sldId id="258" r:id="rId9"/>
-    <p:sldId id="259" r:id="rId10"/>
-    <p:sldId id="260" r:id="rId11"/>
-    <p:sldId id="261" r:id="rId12"/>
-    <p:sldId id="262" r:id="rId13"/>
-    <p:sldId id="263" r:id="rId14"/>
-    <p:sldId id="264" r:id="rId15"/>
+    <p:sldId id="256" r:id="rId2"/>
+    <p:sldId id="257" r:id="rId3"/>
+    <p:sldId id="258" r:id="rId4"/>
+    <p:sldId id="259" r:id="rId5"/>
+    <p:sldId id="261" r:id="rId6"/>
+    <p:sldId id="260" r:id="rId7"/>
+    <p:sldId id="262" r:id="rId8"/>
+    <p:sldId id="263" r:id="rId9"/>
+    <p:sldId id="264" r:id="rId10"/>
   </p:sldIdLst>
-  <p:sldSz cx="12191695" cy="6858000" type="screen4x3"/>
+  <p:sldSz cx="12192000" cy="6858000"/>
   <p:notesSz cx="6858000" cy="9144000"/>
   <p:defaultTextStyle>
     <a:defPPr>
@@ -112,6 +112,22 @@
       </a:defRPr>
     </a:lvl9pPr>
   </p:defaultTextStyle>
+  <p:extLst>
+    <p:ext uri="{EFAFB233-063F-42B5-8137-9DF3F51BA10A}">
+      <p15:sldGuideLst xmlns:p15="http://schemas.microsoft.com/office/powerpoint/2012/main">
+        <p15:guide id="1" orient="horz" pos="2160">
+          <p15:clr>
+            <a:srgbClr val="A4A3A4"/>
+          </p15:clr>
+        </p15:guide>
+        <p15:guide id="2" pos="2880">
+          <p15:clr>
+            <a:srgbClr val="A4A3A4"/>
+          </p15:clr>
+        </p15:guide>
+      </p15:sldGuideLst>
+    </p:ext>
+  </p:extLst>
 </p:presentation>
 </file>
 
@@ -153,10 +169,9 @@
           <a:lstStyle/>
           <a:p>
             <a:r>
-              <a:rPr lang="en-US" smtClean="0"/>
+              <a:rPr lang="en-US"/>
               <a:t>Click to edit Master title style</a:t>
             </a:r>
-            <a:endParaRPr lang="en-US"/>
           </a:p>
         </p:txBody>
       </p:sp>
@@ -272,10 +287,9 @@
           </a:lstStyle>
           <a:p>
             <a:r>
-              <a:rPr lang="en-US" smtClean="0"/>
+              <a:rPr lang="en-US"/>
               <a:t>Click to edit Master subtitle style</a:t>
             </a:r>
-            <a:endParaRPr lang="en-US"/>
           </a:p>
         </p:txBody>
       </p:sp>
@@ -296,7 +310,7 @@
           <a:p>
             <a:fld id="{5BCAD085-E8A6-8845-BD4E-CB4CCA059FC4}" type="datetimeFigureOut">
               <a:rPr lang="en-US" smtClean="0"/>
-              <a:t>1/27/13</a:t>
+              <a:t>4/30/26</a:t>
             </a:fld>
             <a:endParaRPr lang="en-US"/>
           </a:p>
@@ -390,10 +404,9 @@
           <a:lstStyle/>
           <a:p>
             <a:r>
-              <a:rPr lang="en-US" smtClean="0"/>
+              <a:rPr lang="en-US"/>
               <a:t>Click to edit Master title style</a:t>
             </a:r>
-            <a:endParaRPr lang="en-US"/>
           </a:p>
         </p:txBody>
       </p:sp>
@@ -414,38 +427,37 @@
           <a:p>
             <a:pPr lvl="0"/>
             <a:r>
-              <a:rPr lang="en-US" smtClean="0"/>
+              <a:rPr lang="en-US"/>
               <a:t>Click to edit Master text styles</a:t>
             </a:r>
           </a:p>
           <a:p>
             <a:pPr lvl="1"/>
             <a:r>
-              <a:rPr lang="en-US" smtClean="0"/>
+              <a:rPr lang="en-US"/>
               <a:t>Second level</a:t>
             </a:r>
           </a:p>
           <a:p>
             <a:pPr lvl="2"/>
             <a:r>
-              <a:rPr lang="en-US" smtClean="0"/>
+              <a:rPr lang="en-US"/>
               <a:t>Third level</a:t>
             </a:r>
           </a:p>
           <a:p>
             <a:pPr lvl="3"/>
             <a:r>
-              <a:rPr lang="en-US" smtClean="0"/>
+              <a:rPr lang="en-US"/>
               <a:t>Fourth level</a:t>
             </a:r>
           </a:p>
           <a:p>
             <a:pPr lvl="4"/>
             <a:r>
-              <a:rPr lang="en-US" smtClean="0"/>
+              <a:rPr lang="en-US"/>
               <a:t>Fifth level</a:t>
             </a:r>
-            <a:endParaRPr lang="en-US"/>
           </a:p>
         </p:txBody>
       </p:sp>
@@ -466,7 +478,7 @@
           <a:p>
             <a:fld id="{5BCAD085-E8A6-8845-BD4E-CB4CCA059FC4}" type="datetimeFigureOut">
               <a:rPr lang="en-US" smtClean="0"/>
-              <a:t>1/27/13</a:t>
+              <a:t>4/30/26</a:t>
             </a:fld>
             <a:endParaRPr lang="en-US"/>
           </a:p>
@@ -565,10 +577,9 @@
           <a:lstStyle/>
           <a:p>
             <a:r>
-              <a:rPr lang="en-US" smtClean="0"/>
+              <a:rPr lang="en-US"/>
               <a:t>Click to edit Master title style</a:t>
             </a:r>
-            <a:endParaRPr lang="en-US"/>
           </a:p>
         </p:txBody>
       </p:sp>
@@ -594,38 +605,37 @@
           <a:p>
             <a:pPr lvl="0"/>
             <a:r>
-              <a:rPr lang="en-US" smtClean="0"/>
+              <a:rPr lang="en-US"/>
               <a:t>Click to edit Master text styles</a:t>
             </a:r>
           </a:p>
           <a:p>
             <a:pPr lvl="1"/>
             <a:r>
-              <a:rPr lang="en-US" smtClean="0"/>
+              <a:rPr lang="en-US"/>
               <a:t>Second level</a:t>
             </a:r>
           </a:p>
           <a:p>
             <a:pPr lvl="2"/>
             <a:r>
-              <a:rPr lang="en-US" smtClean="0"/>
+              <a:rPr lang="en-US"/>
               <a:t>Third level</a:t>
             </a:r>
           </a:p>
           <a:p>
             <a:pPr lvl="3"/>
             <a:r>
-              <a:rPr lang="en-US" smtClean="0"/>
+              <a:rPr lang="en-US"/>
               <a:t>Fourth level</a:t>
             </a:r>
           </a:p>
           <a:p>
             <a:pPr lvl="4"/>
             <a:r>
-              <a:rPr lang="en-US" smtClean="0"/>
+              <a:rPr lang="en-US"/>
               <a:t>Fifth level</a:t>
             </a:r>
-            <a:endParaRPr lang="en-US"/>
           </a:p>
         </p:txBody>
       </p:sp>
@@ -646,7 +656,7 @@
           <a:p>
             <a:fld id="{5BCAD085-E8A6-8845-BD4E-CB4CCA059FC4}" type="datetimeFigureOut">
               <a:rPr lang="en-US" smtClean="0"/>
-              <a:t>1/27/13</a:t>
+              <a:t>4/30/26</a:t>
             </a:fld>
             <a:endParaRPr lang="en-US"/>
           </a:p>
@@ -740,10 +750,9 @@
           <a:lstStyle/>
           <a:p>
             <a:r>
-              <a:rPr lang="en-US" smtClean="0"/>
+              <a:rPr lang="en-US"/>
               <a:t>Click to edit Master title style</a:t>
             </a:r>
-            <a:endParaRPr lang="en-US"/>
           </a:p>
         </p:txBody>
       </p:sp>
@@ -764,38 +773,37 @@
           <a:p>
             <a:pPr lvl="0"/>
             <a:r>
-              <a:rPr lang="en-US" smtClean="0"/>
+              <a:rPr lang="en-US"/>
               <a:t>Click to edit Master text styles</a:t>
             </a:r>
           </a:p>
           <a:p>
             <a:pPr lvl="1"/>
             <a:r>
-              <a:rPr lang="en-US" smtClean="0"/>
+              <a:rPr lang="en-US"/>
               <a:t>Second level</a:t>
             </a:r>
           </a:p>
           <a:p>
             <a:pPr lvl="2"/>
             <a:r>
-              <a:rPr lang="en-US" smtClean="0"/>
+              <a:rPr lang="en-US"/>
               <a:t>Third level</a:t>
             </a:r>
           </a:p>
           <a:p>
             <a:pPr lvl="3"/>
             <a:r>
-              <a:rPr lang="en-US" smtClean="0"/>
+              <a:rPr lang="en-US"/>
               <a:t>Fourth level</a:t>
             </a:r>
           </a:p>
           <a:p>
             <a:pPr lvl="4"/>
             <a:r>
-              <a:rPr lang="en-US" smtClean="0"/>
+              <a:rPr lang="en-US"/>
               <a:t>Fifth level</a:t>
             </a:r>
-            <a:endParaRPr lang="en-US"/>
           </a:p>
         </p:txBody>
       </p:sp>
@@ -816,7 +824,7 @@
           <a:p>
             <a:fld id="{5BCAD085-E8A6-8845-BD4E-CB4CCA059FC4}" type="datetimeFigureOut">
               <a:rPr lang="en-US" smtClean="0"/>
-              <a:t>1/27/13</a:t>
+              <a:t>4/30/26</a:t>
             </a:fld>
             <a:endParaRPr lang="en-US"/>
           </a:p>
@@ -919,10 +927,9 @@
           </a:lstStyle>
           <a:p>
             <a:r>
-              <a:rPr lang="en-US" smtClean="0"/>
+              <a:rPr lang="en-US"/>
               <a:t>Click to edit Master title style</a:t>
             </a:r>
-            <a:endParaRPr lang="en-US"/>
           </a:p>
         </p:txBody>
       </p:sp>
@@ -1039,7 +1046,7 @@
           <a:p>
             <a:pPr lvl="0"/>
             <a:r>
-              <a:rPr lang="en-US" smtClean="0"/>
+              <a:rPr lang="en-US"/>
               <a:t>Click to edit Master text styles</a:t>
             </a:r>
           </a:p>
@@ -1062,7 +1069,7 @@
           <a:p>
             <a:fld id="{5BCAD085-E8A6-8845-BD4E-CB4CCA059FC4}" type="datetimeFigureOut">
               <a:rPr lang="en-US" smtClean="0"/>
-              <a:t>1/27/13</a:t>
+              <a:t>4/30/26</a:t>
             </a:fld>
             <a:endParaRPr lang="en-US"/>
           </a:p>
@@ -1156,10 +1163,9 @@
           <a:lstStyle/>
           <a:p>
             <a:r>
-              <a:rPr lang="en-US" smtClean="0"/>
+              <a:rPr lang="en-US"/>
               <a:t>Click to edit Master title style</a:t>
             </a:r>
-            <a:endParaRPr lang="en-US"/>
           </a:p>
         </p:txBody>
       </p:sp>
@@ -1213,38 +1219,37 @@
           <a:p>
             <a:pPr lvl="0"/>
             <a:r>
-              <a:rPr lang="en-US" smtClean="0"/>
+              <a:rPr lang="en-US"/>
               <a:t>Click to edit Master text styles</a:t>
             </a:r>
           </a:p>
           <a:p>
             <a:pPr lvl="1"/>
             <a:r>
-              <a:rPr lang="en-US" smtClean="0"/>
+              <a:rPr lang="en-US"/>
               <a:t>Second level</a:t>
             </a:r>
           </a:p>
           <a:p>
             <a:pPr lvl="2"/>
             <a:r>
-              <a:rPr lang="en-US" smtClean="0"/>
+              <a:rPr lang="en-US"/>
               <a:t>Third level</a:t>
             </a:r>
           </a:p>
           <a:p>
             <a:pPr lvl="3"/>
             <a:r>
-              <a:rPr lang="en-US" smtClean="0"/>
+              <a:rPr lang="en-US"/>
               <a:t>Fourth level</a:t>
             </a:r>
           </a:p>
           <a:p>
             <a:pPr lvl="4"/>
             <a:r>
-              <a:rPr lang="en-US" smtClean="0"/>
+              <a:rPr lang="en-US"/>
               <a:t>Fifth level</a:t>
             </a:r>
-            <a:endParaRPr lang="en-US"/>
           </a:p>
         </p:txBody>
       </p:sp>
@@ -1298,38 +1303,37 @@
           <a:p>
             <a:pPr lvl="0"/>
             <a:r>
-              <a:rPr lang="en-US" smtClean="0"/>
+              <a:rPr lang="en-US"/>
               <a:t>Click to edit Master text styles</a:t>
             </a:r>
           </a:p>
           <a:p>
             <a:pPr lvl="1"/>
             <a:r>
-              <a:rPr lang="en-US" smtClean="0"/>
+              <a:rPr lang="en-US"/>
               <a:t>Second level</a:t>
             </a:r>
           </a:p>
           <a:p>
             <a:pPr lvl="2"/>
             <a:r>
-              <a:rPr lang="en-US" smtClean="0"/>
+              <a:rPr lang="en-US"/>
               <a:t>Third level</a:t>
             </a:r>
           </a:p>
           <a:p>
             <a:pPr lvl="3"/>
             <a:r>
-              <a:rPr lang="en-US" smtClean="0"/>
+              <a:rPr lang="en-US"/>
               <a:t>Fourth level</a:t>
             </a:r>
           </a:p>
           <a:p>
             <a:pPr lvl="4"/>
             <a:r>
-              <a:rPr lang="en-US" smtClean="0"/>
+              <a:rPr lang="en-US"/>
               <a:t>Fifth level</a:t>
             </a:r>
-            <a:endParaRPr lang="en-US"/>
           </a:p>
         </p:txBody>
       </p:sp>
@@ -1350,7 +1354,7 @@
           <a:p>
             <a:fld id="{5BCAD085-E8A6-8845-BD4E-CB4CCA059FC4}" type="datetimeFigureOut">
               <a:rPr lang="en-US" smtClean="0"/>
-              <a:t>1/27/13</a:t>
+              <a:t>4/30/26</a:t>
             </a:fld>
             <a:endParaRPr lang="en-US"/>
           </a:p>
@@ -1448,10 +1452,9 @@
           </a:lstStyle>
           <a:p>
             <a:r>
-              <a:rPr lang="en-US" smtClean="0"/>
+              <a:rPr lang="en-US"/>
               <a:t>Click to edit Master title style</a:t>
             </a:r>
-            <a:endParaRPr lang="en-US"/>
           </a:p>
         </p:txBody>
       </p:sp>
@@ -1514,7 +1517,7 @@
           <a:p>
             <a:pPr lvl="0"/>
             <a:r>
-              <a:rPr lang="en-US" smtClean="0"/>
+              <a:rPr lang="en-US"/>
               <a:t>Click to edit Master text styles</a:t>
             </a:r>
           </a:p>
@@ -1570,38 +1573,37 @@
           <a:p>
             <a:pPr lvl="0"/>
             <a:r>
-              <a:rPr lang="en-US" smtClean="0"/>
+              <a:rPr lang="en-US"/>
               <a:t>Click to edit Master text styles</a:t>
             </a:r>
           </a:p>
           <a:p>
             <a:pPr lvl="1"/>
             <a:r>
-              <a:rPr lang="en-US" smtClean="0"/>
+              <a:rPr lang="en-US"/>
               <a:t>Second level</a:t>
             </a:r>
           </a:p>
           <a:p>
             <a:pPr lvl="2"/>
             <a:r>
-              <a:rPr lang="en-US" smtClean="0"/>
+              <a:rPr lang="en-US"/>
               <a:t>Third level</a:t>
             </a:r>
           </a:p>
           <a:p>
             <a:pPr lvl="3"/>
             <a:r>
-              <a:rPr lang="en-US" smtClean="0"/>
+              <a:rPr lang="en-US"/>
               <a:t>Fourth level</a:t>
             </a:r>
           </a:p>
           <a:p>
             <a:pPr lvl="4"/>
             <a:r>
-              <a:rPr lang="en-US" smtClean="0"/>
+              <a:rPr lang="en-US"/>
               <a:t>Fifth level</a:t>
             </a:r>
-            <a:endParaRPr lang="en-US"/>
           </a:p>
         </p:txBody>
       </p:sp>
@@ -1664,7 +1666,7 @@
           <a:p>
             <a:pPr lvl="0"/>
             <a:r>
-              <a:rPr lang="en-US" smtClean="0"/>
+              <a:rPr lang="en-US"/>
               <a:t>Click to edit Master text styles</a:t>
             </a:r>
           </a:p>
@@ -1720,38 +1722,37 @@
           <a:p>
             <a:pPr lvl="0"/>
             <a:r>
-              <a:rPr lang="en-US" smtClean="0"/>
+              <a:rPr lang="en-US"/>
               <a:t>Click to edit Master text styles</a:t>
             </a:r>
           </a:p>
           <a:p>
             <a:pPr lvl="1"/>
             <a:r>
-              <a:rPr lang="en-US" smtClean="0"/>
+              <a:rPr lang="en-US"/>
               <a:t>Second level</a:t>
             </a:r>
           </a:p>
           <a:p>
             <a:pPr lvl="2"/>
             <a:r>
-              <a:rPr lang="en-US" smtClean="0"/>
+              <a:rPr lang="en-US"/>
               <a:t>Third level</a:t>
             </a:r>
           </a:p>
           <a:p>
             <a:pPr lvl="3"/>
             <a:r>
-              <a:rPr lang="en-US" smtClean="0"/>
+              <a:rPr lang="en-US"/>
               <a:t>Fourth level</a:t>
             </a:r>
           </a:p>
           <a:p>
             <a:pPr lvl="4"/>
             <a:r>
-              <a:rPr lang="en-US" smtClean="0"/>
+              <a:rPr lang="en-US"/>
               <a:t>Fifth level</a:t>
             </a:r>
-            <a:endParaRPr lang="en-US"/>
           </a:p>
         </p:txBody>
       </p:sp>
@@ -1772,7 +1773,7 @@
           <a:p>
             <a:fld id="{5BCAD085-E8A6-8845-BD4E-CB4CCA059FC4}" type="datetimeFigureOut">
               <a:rPr lang="en-US" smtClean="0"/>
-              <a:t>1/27/13</a:t>
+              <a:t>4/30/26</a:t>
             </a:fld>
             <a:endParaRPr lang="en-US"/>
           </a:p>
@@ -1866,10 +1867,9 @@
           <a:lstStyle/>
           <a:p>
             <a:r>
-              <a:rPr lang="en-US" smtClean="0"/>
+              <a:rPr lang="en-US"/>
               <a:t>Click to edit Master title style</a:t>
             </a:r>
-            <a:endParaRPr lang="en-US"/>
           </a:p>
         </p:txBody>
       </p:sp>
@@ -1890,7 +1890,7 @@
           <a:p>
             <a:fld id="{5BCAD085-E8A6-8845-BD4E-CB4CCA059FC4}" type="datetimeFigureOut">
               <a:rPr lang="en-US" smtClean="0"/>
-              <a:t>1/27/13</a:t>
+              <a:t>4/30/26</a:t>
             </a:fld>
             <a:endParaRPr lang="en-US"/>
           </a:p>
@@ -1985,7 +1985,7 @@
           <a:p>
             <a:fld id="{5BCAD085-E8A6-8845-BD4E-CB4CCA059FC4}" type="datetimeFigureOut">
               <a:rPr lang="en-US" smtClean="0"/>
-              <a:t>1/27/13</a:t>
+              <a:t>4/30/26</a:t>
             </a:fld>
             <a:endParaRPr lang="en-US"/>
           </a:p>
@@ -2088,10 +2088,9 @@
           </a:lstStyle>
           <a:p>
             <a:r>
-              <a:rPr lang="en-US" smtClean="0"/>
+              <a:rPr lang="en-US"/>
               <a:t>Click to edit Master title style</a:t>
             </a:r>
-            <a:endParaRPr lang="en-US"/>
           </a:p>
         </p:txBody>
       </p:sp>
@@ -2145,38 +2144,37 @@
           <a:p>
             <a:pPr lvl="0"/>
             <a:r>
-              <a:rPr lang="en-US" smtClean="0"/>
+              <a:rPr lang="en-US"/>
               <a:t>Click to edit Master text styles</a:t>
             </a:r>
           </a:p>
           <a:p>
             <a:pPr lvl="1"/>
             <a:r>
-              <a:rPr lang="en-US" smtClean="0"/>
+              <a:rPr lang="en-US"/>
               <a:t>Second level</a:t>
             </a:r>
           </a:p>
           <a:p>
             <a:pPr lvl="2"/>
             <a:r>
-              <a:rPr lang="en-US" smtClean="0"/>
+              <a:rPr lang="en-US"/>
               <a:t>Third level</a:t>
             </a:r>
           </a:p>
           <a:p>
             <a:pPr lvl="3"/>
             <a:r>
-              <a:rPr lang="en-US" smtClean="0"/>
+              <a:rPr lang="en-US"/>
               <a:t>Fourth level</a:t>
             </a:r>
           </a:p>
           <a:p>
             <a:pPr lvl="4"/>
             <a:r>
-              <a:rPr lang="en-US" smtClean="0"/>
+              <a:rPr lang="en-US"/>
               <a:t>Fifth level</a:t>
             </a:r>
-            <a:endParaRPr lang="en-US"/>
           </a:p>
         </p:txBody>
       </p:sp>
@@ -2239,7 +2237,7 @@
           <a:p>
             <a:pPr lvl="0"/>
             <a:r>
-              <a:rPr lang="en-US" smtClean="0"/>
+              <a:rPr lang="en-US"/>
               <a:t>Click to edit Master text styles</a:t>
             </a:r>
           </a:p>
@@ -2262,7 +2260,7 @@
           <a:p>
             <a:fld id="{5BCAD085-E8A6-8845-BD4E-CB4CCA059FC4}" type="datetimeFigureOut">
               <a:rPr lang="en-US" smtClean="0"/>
-              <a:t>1/27/13</a:t>
+              <a:t>4/30/26</a:t>
             </a:fld>
             <a:endParaRPr lang="en-US"/>
           </a:p>
@@ -2365,10 +2363,9 @@
           </a:lstStyle>
           <a:p>
             <a:r>
-              <a:rPr lang="en-US" smtClean="0"/>
+              <a:rPr lang="en-US"/>
               <a:t>Click to edit Master title style</a:t>
             </a:r>
-            <a:endParaRPr lang="en-US"/>
           </a:p>
         </p:txBody>
       </p:sp>
@@ -2492,7 +2489,7 @@
           <a:p>
             <a:pPr lvl="0"/>
             <a:r>
-              <a:rPr lang="en-US" smtClean="0"/>
+              <a:rPr lang="en-US"/>
               <a:t>Click to edit Master text styles</a:t>
             </a:r>
           </a:p>
@@ -2515,7 +2512,7 @@
           <a:p>
             <a:fld id="{5BCAD085-E8A6-8845-BD4E-CB4CCA059FC4}" type="datetimeFigureOut">
               <a:rPr lang="en-US" smtClean="0"/>
-              <a:t>1/27/13</a:t>
+              <a:t>4/30/26</a:t>
             </a:fld>
             <a:endParaRPr lang="en-US"/>
           </a:p>
@@ -2624,10 +2621,9 @@
           <a:lstStyle/>
           <a:p>
             <a:r>
-              <a:rPr lang="en-US" smtClean="0"/>
+              <a:rPr lang="en-US"/>
               <a:t>Click to edit Master title style</a:t>
             </a:r>
-            <a:endParaRPr lang="en-US"/>
           </a:p>
         </p:txBody>
       </p:sp>
@@ -2658,38 +2654,37 @@
           <a:p>
             <a:pPr lvl="0"/>
             <a:r>
-              <a:rPr lang="en-US" smtClean="0"/>
+              <a:rPr lang="en-US"/>
               <a:t>Click to edit Master text styles</a:t>
             </a:r>
           </a:p>
           <a:p>
             <a:pPr lvl="1"/>
             <a:r>
-              <a:rPr lang="en-US" smtClean="0"/>
+              <a:rPr lang="en-US"/>
               <a:t>Second level</a:t>
             </a:r>
           </a:p>
           <a:p>
             <a:pPr lvl="2"/>
             <a:r>
-              <a:rPr lang="en-US" smtClean="0"/>
+              <a:rPr lang="en-US"/>
               <a:t>Third level</a:t>
             </a:r>
           </a:p>
           <a:p>
             <a:pPr lvl="3"/>
             <a:r>
-              <a:rPr lang="en-US" smtClean="0"/>
+              <a:rPr lang="en-US"/>
               <a:t>Fourth level</a:t>
             </a:r>
           </a:p>
           <a:p>
             <a:pPr lvl="4"/>
             <a:r>
-              <a:rPr lang="en-US" smtClean="0"/>
+              <a:rPr lang="en-US"/>
               <a:t>Fifth level</a:t>
             </a:r>
-            <a:endParaRPr lang="en-US"/>
           </a:p>
         </p:txBody>
       </p:sp>
@@ -2728,7 +2723,7 @@
           <a:p>
             <a:fld id="{5BCAD085-E8A6-8845-BD4E-CB4CCA059FC4}" type="datetimeFigureOut">
               <a:rPr lang="en-US" smtClean="0"/>
-              <a:t>1/27/13</a:t>
+              <a:t>4/30/26</a:t>
             </a:fld>
             <a:endParaRPr lang="en-US"/>
           </a:p>
@@ -3087,7 +3082,7 @@
 </file>
 
 <file path=ppt/slides/slide1.xml><?xml version="1.0" encoding="utf-8"?>
-<p:sld xmlns:a="http://schemas.openxmlformats.org/drawingml/2006/main" xmlns:p="http://schemas.openxmlformats.org/presentationml/2006/main" xmlns:r="http://schemas.openxmlformats.org/officeDocument/2006/relationships">
+<p:sld xmlns:a="http://schemas.openxmlformats.org/drawingml/2006/main" xmlns:r="http://schemas.openxmlformats.org/officeDocument/2006/relationships" xmlns:p="http://schemas.openxmlformats.org/presentationml/2006/main">
   <p:cSld>
     <p:spTree>
       <p:nvGrpSpPr>
@@ -3095,7 +3090,14 @@
         <p:cNvGrpSpPr/>
         <p:nvPr/>
       </p:nvGrpSpPr>
-      <p:grpSpPr/>
+      <p:grpSpPr>
+        <a:xfrm>
+          <a:off x="0" y="0"/>
+          <a:ext cx="0" cy="0"/>
+          <a:chOff x="0" y="0"/>
+          <a:chExt cx="0" cy="0"/>
+        </a:xfrm>
+      </p:grpSpPr>
       <p:sp>
         <p:nvSpPr>
           <p:cNvPr id="2" name="Rectangle 1"/>
@@ -3137,6 +3139,7 @@
           <a:lstStyle/>
           <a:p>
             <a:pPr algn="ctr"/>
+            <a:endParaRPr/>
           </a:p>
         </p:txBody>
       </p:sp>
@@ -3178,18 +3181,27 @@
           </a:fontRef>
         </p:style>
         <p:txBody>
-          <a:bodyPr rtlCol="0" anchor="ctr" wrap="square" lIns="109728" rIns="109728" tIns="73152" bIns="73152"/>
+          <a:bodyPr wrap="square" lIns="109728" tIns="73152" rIns="109728" bIns="73152" rtlCol="0" anchor="ctr"/>
           <a:lstStyle/>
           <a:p>
             <a:pPr algn="ctr"/>
             <a:r>
-              <a:rPr sz="1200" b="1">
-                <a:solidFill>
-                  <a:srgbClr val="101010"/>
-                </a:solidFill>
-                <a:latin typeface="Helvetica Neue"/>
-              </a:rPr>
-              <a:t>HACKNU '26  -  NURIS</a:t>
+              <a:rPr lang="en-US" sz="1200" b="1" dirty="0" err="1">
+                <a:solidFill>
+                  <a:srgbClr val="101010"/>
+                </a:solidFill>
+                <a:latin typeface="Arial"/>
+              </a:rPr>
+              <a:t>DropOuts</a:t>
+            </a:r>
+            <a:r>
+              <a:rPr sz="1200" b="1" dirty="0">
+                <a:solidFill>
+                  <a:srgbClr val="101010"/>
+                </a:solidFill>
+                <a:latin typeface="Arial"/>
+              </a:rPr>
+              <a:t> '26  -  NURIS</a:t>
             </a:r>
           </a:p>
         </p:txBody>
@@ -3203,7 +3215,7 @@
         <p:spPr>
           <a:xfrm>
             <a:off x="502920" y="1463040"/>
-            <a:ext cx="10058400" cy="1828800"/>
+            <a:ext cx="10972800" cy="1828800"/>
           </a:xfrm>
           <a:prstGeom prst="rect">
             <a:avLst/>
@@ -3211,7 +3223,7 @@
           <a:noFill/>
         </p:spPr>
         <p:txBody>
-          <a:bodyPr wrap="square" lIns="109728" rIns="109728" tIns="73152" bIns="73152" anchor="t">
+          <a:bodyPr wrap="square" lIns="109728" tIns="73152" rIns="109728" bIns="73152" anchor="t">
             <a:spAutoFit/>
           </a:bodyPr>
           <a:lstStyle/>
@@ -3222,9 +3234,9 @@
                 <a:solidFill>
                   <a:srgbClr val="101010"/>
                 </a:solidFill>
-                <a:latin typeface="Helvetica Neue"/>
-              </a:rPr>
-              <a:t>RGB satellite imagery</a:t>
+                <a:latin typeface="Arial"/>
+              </a:rPr>
+              <a:t>RGB-снимки со спутника</a:t>
             </a:r>
           </a:p>
         </p:txBody>
@@ -3238,7 +3250,7 @@
         <p:spPr>
           <a:xfrm>
             <a:off x="502920" y="2286000"/>
-            <a:ext cx="10058400" cy="1280160"/>
+            <a:ext cx="10972800" cy="1280160"/>
           </a:xfrm>
           <a:prstGeom prst="rect">
             <a:avLst/>
@@ -3246,7 +3258,7 @@
           <a:noFill/>
         </p:spPr>
         <p:txBody>
-          <a:bodyPr wrap="square" lIns="109728" rIns="109728" tIns="73152" bIns="73152" anchor="t">
+          <a:bodyPr wrap="square" lIns="109728" tIns="73152" rIns="109728" bIns="73152" anchor="t">
             <a:spAutoFit/>
           </a:bodyPr>
           <a:lstStyle/>
@@ -3257,9 +3269,9 @@
                 <a:solidFill>
                   <a:srgbClr val="101010"/>
                 </a:solidFill>
-                <a:latin typeface="Helvetica Neue"/>
-              </a:rPr>
-              <a:t>to vector GIS features.</a:t>
+                <a:latin typeface="Arial"/>
+              </a:rPr>
+              <a:t>в векторные ГИС-объекты.</a:t>
             </a:r>
           </a:p>
         </p:txBody>
@@ -3273,7 +3285,7 @@
         <p:spPr>
           <a:xfrm>
             <a:off x="502920" y="3749039"/>
-            <a:ext cx="9144000" cy="731520"/>
+            <a:ext cx="10972800" cy="731520"/>
           </a:xfrm>
           <a:prstGeom prst="rect">
             <a:avLst/>
@@ -3281,7 +3293,7 @@
           <a:noFill/>
         </p:spPr>
         <p:txBody>
-          <a:bodyPr wrap="square" lIns="109728" rIns="109728" tIns="73152" bIns="73152" anchor="t">
+          <a:bodyPr wrap="square" lIns="109728" tIns="73152" rIns="109728" bIns="73152" anchor="t">
             <a:spAutoFit/>
           </a:bodyPr>
           <a:lstStyle/>
@@ -3292,9 +3304,9 @@
                 <a:solidFill>
                   <a:srgbClr val="101010"/>
                 </a:solidFill>
-                <a:latin typeface="Helvetica Neue"/>
-              </a:rPr>
-              <a:t>A reproducible prototype: GeoTIFF -&gt; tiled classification -&gt; polygons / lines / points -&gt; GeoJSON + GeoPackage.</a:t>
+                <a:latin typeface="Arial"/>
+              </a:rPr>
+              <a:t>Воспроизводимый прототип: GeoTIFF -&gt; плиточная классификация -&gt; полигоны / линии / точки -&gt; GeoJSON + GeoPackage.</a:t>
             </a:r>
           </a:p>
         </p:txBody>
@@ -3350,6 +3362,7 @@
           <a:lstStyle/>
           <a:p>
             <a:pPr algn="ctr"/>
+            <a:endParaRPr/>
           </a:p>
         </p:txBody>
       </p:sp>
@@ -3370,7 +3383,7 @@
           <a:noFill/>
         </p:spPr>
         <p:txBody>
-          <a:bodyPr wrap="square" lIns="109728" rIns="109728" tIns="73152" bIns="73152" anchor="t">
+          <a:bodyPr wrap="square" lIns="109728" tIns="73152" rIns="109728" bIns="73152" anchor="t">
             <a:spAutoFit/>
           </a:bodyPr>
           <a:lstStyle/>
@@ -3381,9 +3394,9 @@
                 <a:solidFill>
                   <a:srgbClr val="101010"/>
                 </a:solidFill>
-                <a:latin typeface="Helvetica Neue"/>
-              </a:rPr>
-              <a:t>2 demo cities</a:t>
+                <a:latin typeface="Arial"/>
+              </a:rPr>
+              <a:t>2 демо-города</a:t>
             </a:r>
           </a:p>
         </p:txBody>
@@ -3405,7 +3418,7 @@
           <a:noFill/>
         </p:spPr>
         <p:txBody>
-          <a:bodyPr wrap="square" lIns="164592" rIns="164592" tIns="128016" bIns="128016" anchor="t">
+          <a:bodyPr wrap="square" lIns="164592" tIns="128016" rIns="164592" bIns="128016" anchor="t">
             <a:spAutoFit/>
           </a:bodyPr>
           <a:lstStyle/>
@@ -3420,9 +3433,9 @@
                 <a:solidFill>
                   <a:srgbClr val="101010"/>
                 </a:solidFill>
-                <a:latin typeface="Helvetica Neue"/>
-              </a:rPr>
-              <a:t>Almaty + Astana</a:t>
+                <a:latin typeface="Arial"/>
+              </a:rPr>
+              <a:t>Алматы и Астана</a:t>
             </a:r>
           </a:p>
           <a:p>
@@ -3436,9 +3449,9 @@
                 <a:solidFill>
                   <a:srgbClr val="101010"/>
                 </a:solidFill>
-                <a:latin typeface="Helvetica Neue"/>
-              </a:rPr>
-              <a:t>RGB only, no NIR / labels</a:t>
+                <a:latin typeface="Arial"/>
+              </a:rPr>
+              <a:t>Только RGB, без NIR и разметки</a:t>
             </a:r>
           </a:p>
         </p:txBody>
@@ -3494,6 +3507,7 @@
           <a:lstStyle/>
           <a:p>
             <a:pPr algn="ctr"/>
+            <a:endParaRPr/>
           </a:p>
         </p:txBody>
       </p:sp>
@@ -3514,7 +3528,7 @@
           <a:noFill/>
         </p:spPr>
         <p:txBody>
-          <a:bodyPr wrap="square" lIns="109728" rIns="109728" tIns="73152" bIns="73152" anchor="t">
+          <a:bodyPr wrap="square" lIns="109728" tIns="73152" rIns="109728" bIns="73152" anchor="t">
             <a:spAutoFit/>
           </a:bodyPr>
           <a:lstStyle/>
@@ -3525,9 +3539,9 @@
                 <a:solidFill>
                   <a:srgbClr val="101010"/>
                 </a:solidFill>
-                <a:latin typeface="Helvetica Neue"/>
-              </a:rPr>
-              <a:t>1,932 features</a:t>
+                <a:latin typeface="Arial"/>
+              </a:rPr>
+              <a:t>1 932 объекта</a:t>
             </a:r>
           </a:p>
         </p:txBody>
@@ -3549,7 +3563,7 @@
           <a:noFill/>
         </p:spPr>
         <p:txBody>
-          <a:bodyPr wrap="square" lIns="164592" rIns="164592" tIns="128016" bIns="128016" anchor="t">
+          <a:bodyPr wrap="square" lIns="164592" tIns="128016" rIns="164592" bIns="128016" anchor="t">
             <a:spAutoFit/>
           </a:bodyPr>
           <a:lstStyle/>
@@ -3564,9 +3578,9 @@
                 <a:solidFill>
                   <a:srgbClr val="101010"/>
                 </a:solidFill>
-                <a:latin typeface="Helvetica Neue"/>
-              </a:rPr>
-              <a:t>Across 6 thematic classes</a:t>
+                <a:latin typeface="Arial"/>
+              </a:rPr>
+              <a:t>6 тематических классов</a:t>
             </a:r>
           </a:p>
           <a:p>
@@ -3580,9 +3594,9 @@
                 <a:solidFill>
                   <a:srgbClr val="101010"/>
                 </a:solidFill>
-                <a:latin typeface="Helvetica Neue"/>
-              </a:rPr>
-              <a:t>Validated geometries (RFC 7946)</a:t>
+                <a:latin typeface="Arial"/>
+              </a:rPr>
+              <a:t>Валидные геометрии (RFC 7946)</a:t>
             </a:r>
           </a:p>
         </p:txBody>
@@ -3638,6 +3652,7 @@
           <a:lstStyle/>
           <a:p>
             <a:pPr algn="ctr"/>
+            <a:endParaRPr/>
           </a:p>
         </p:txBody>
       </p:sp>
@@ -3658,7 +3673,7 @@
           <a:noFill/>
         </p:spPr>
         <p:txBody>
-          <a:bodyPr wrap="square" lIns="109728" rIns="109728" tIns="73152" bIns="73152" anchor="t">
+          <a:bodyPr wrap="square" lIns="109728" tIns="73152" rIns="109728" bIns="73152" anchor="t">
             <a:spAutoFit/>
           </a:bodyPr>
           <a:lstStyle/>
@@ -3669,9 +3684,9 @@
                 <a:solidFill>
                   <a:srgbClr val="101010"/>
                 </a:solidFill>
-                <a:latin typeface="Helvetica Neue"/>
-              </a:rPr>
-              <a:t>Per-AOI stats</a:t>
+                <a:latin typeface="Arial"/>
+              </a:rPr>
+              <a:t>Статистика по AOI</a:t>
             </a:r>
           </a:p>
         </p:txBody>
@@ -3693,7 +3708,7 @@
           <a:noFill/>
         </p:spPr>
         <p:txBody>
-          <a:bodyPr wrap="square" lIns="164592" rIns="164592" tIns="128016" bIns="128016" anchor="t">
+          <a:bodyPr wrap="square" lIns="164592" tIns="128016" rIns="164592" bIns="128016" anchor="t">
             <a:spAutoFit/>
           </a:bodyPr>
           <a:lstStyle/>
@@ -3708,9 +3723,9 @@
                 <a:solidFill>
                   <a:srgbClr val="101010"/>
                 </a:solidFill>
-                <a:latin typeface="Helvetica Neue"/>
-              </a:rPr>
-              <a:t>Counts, area, length, density / km^2</a:t>
+                <a:latin typeface="Arial"/>
+              </a:rPr>
+              <a:t>Кол-во, площадь, длина, плотность / км^2</a:t>
             </a:r>
           </a:p>
         </p:txBody>
@@ -3724,7 +3739,7 @@
         <p:spPr>
           <a:xfrm>
             <a:off x="502920" y="6446520"/>
-            <a:ext cx="7315200" cy="274320"/>
+            <a:ext cx="7315200" cy="286232"/>
           </a:xfrm>
           <a:prstGeom prst="rect">
             <a:avLst/>
@@ -3732,21 +3747,36 @@
           <a:noFill/>
         </p:spPr>
         <p:txBody>
-          <a:bodyPr wrap="square" lIns="109728" rIns="109728" tIns="73152" bIns="73152" anchor="t">
+          <a:bodyPr wrap="square" lIns="109728" tIns="73152" rIns="109728" bIns="73152" anchor="t">
             <a:spAutoFit/>
           </a:bodyPr>
           <a:lstStyle/>
           <a:p>
             <a:pPr algn="l"/>
             <a:r>
-              <a:rPr sz="900" b="0">
+              <a:rPr lang="en-US" sz="900" b="0" dirty="0" err="1">
                 <a:solidFill>
                   <a:srgbClr val="808080"/>
                 </a:solidFill>
-                <a:latin typeface="Helvetica Neue"/>
-              </a:rPr>
-              <a:t>Cover</a:t>
-            </a:r>
+                <a:latin typeface="Arial"/>
+              </a:rPr>
+              <a:t>DropOuts</a:t>
+            </a:r>
+            <a:r>
+              <a:rPr lang="en-US" sz="900" b="0" dirty="0">
+                <a:solidFill>
+                  <a:srgbClr val="808080"/>
+                </a:solidFill>
+                <a:latin typeface="Arial"/>
+              </a:rPr>
+              <a:t> ‘26 - NURIS</a:t>
+            </a:r>
+            <a:endParaRPr sz="900" b="0" dirty="0">
+              <a:solidFill>
+                <a:srgbClr val="808080"/>
+              </a:solidFill>
+              <a:latin typeface="Arial"/>
+            </a:endParaRPr>
           </a:p>
         </p:txBody>
       </p:sp>
@@ -3759,7 +3789,7 @@
 </file>
 
 <file path=ppt/slides/slide2.xml><?xml version="1.0" encoding="utf-8"?>
-<p:sld xmlns:a="http://schemas.openxmlformats.org/drawingml/2006/main" xmlns:p="http://schemas.openxmlformats.org/presentationml/2006/main" xmlns:r="http://schemas.openxmlformats.org/officeDocument/2006/relationships">
+<p:sld xmlns:a="http://schemas.openxmlformats.org/drawingml/2006/main" xmlns:r="http://schemas.openxmlformats.org/officeDocument/2006/relationships" xmlns:p="http://schemas.openxmlformats.org/presentationml/2006/main">
   <p:cSld>
     <p:spTree>
       <p:nvGrpSpPr>
@@ -3767,7 +3797,14 @@
         <p:cNvGrpSpPr/>
         <p:nvPr/>
       </p:nvGrpSpPr>
-      <p:grpSpPr/>
+      <p:grpSpPr>
+        <a:xfrm>
+          <a:off x="0" y="0"/>
+          <a:ext cx="0" cy="0"/>
+          <a:chOff x="0" y="0"/>
+          <a:chExt cx="0" cy="0"/>
+        </a:xfrm>
+      </p:grpSpPr>
       <p:sp>
         <p:nvSpPr>
           <p:cNvPr id="2" name="Rectangle 1"/>
@@ -3809,6 +3846,7 @@
           <a:lstStyle/>
           <a:p>
             <a:pPr algn="ctr"/>
+            <a:endParaRPr/>
           </a:p>
         </p:txBody>
       </p:sp>
@@ -3821,7 +3859,7 @@
         <p:spPr>
           <a:xfrm>
             <a:off x="502920" y="411480"/>
-            <a:ext cx="7315200" cy="502920"/>
+            <a:ext cx="9144000" cy="502920"/>
           </a:xfrm>
           <a:prstGeom prst="rect">
             <a:avLst/>
@@ -3829,7 +3867,7 @@
           <a:noFill/>
         </p:spPr>
         <p:txBody>
-          <a:bodyPr wrap="square" lIns="109728" rIns="109728" tIns="73152" bIns="73152" anchor="ctr">
+          <a:bodyPr wrap="square" lIns="109728" tIns="73152" rIns="109728" bIns="73152" anchor="ctr">
             <a:spAutoFit/>
           </a:bodyPr>
           <a:lstStyle/>
@@ -3840,9 +3878,9 @@
                 <a:solidFill>
                   <a:srgbClr val="101010"/>
                 </a:solidFill>
-                <a:latin typeface="Helvetica Neue"/>
-              </a:rPr>
-              <a:t>WHAT WE BUILT</a:t>
+                <a:latin typeface="Arial"/>
+              </a:rPr>
+              <a:t>ЧТО ПОСТРОЕНО</a:t>
             </a:r>
           </a:p>
         </p:txBody>
@@ -3887,6 +3925,7 @@
           <a:lstStyle/>
           <a:p>
             <a:pPr algn="ctr"/>
+            <a:endParaRPr/>
           </a:p>
         </p:txBody>
       </p:sp>
@@ -3928,7 +3967,7 @@
           </a:fontRef>
         </p:style>
         <p:txBody>
-          <a:bodyPr rtlCol="0" anchor="ctr" wrap="square" lIns="109728" rIns="109728" tIns="73152" bIns="73152"/>
+          <a:bodyPr wrap="square" lIns="109728" tIns="73152" rIns="109728" bIns="73152" rtlCol="0" anchor="ctr"/>
           <a:lstStyle/>
           <a:p>
             <a:pPr algn="ctr"/>
@@ -3937,7 +3976,7 @@
                 <a:solidFill>
                   <a:srgbClr val="C8F23E"/>
                 </a:solidFill>
-                <a:latin typeface="Helvetica Neue"/>
+                <a:latin typeface="Arial"/>
               </a:rPr>
               <a:t>02 / 09</a:t>
             </a:r>
@@ -3961,7 +4000,7 @@
           <a:noFill/>
         </p:spPr>
         <p:txBody>
-          <a:bodyPr wrap="square" lIns="109728" rIns="109728" tIns="73152" bIns="73152" anchor="t">
+          <a:bodyPr wrap="square" lIns="109728" tIns="73152" rIns="109728" bIns="73152" anchor="t">
             <a:spAutoFit/>
           </a:bodyPr>
           <a:lstStyle/>
@@ -3972,9 +4011,9 @@
                 <a:solidFill>
                   <a:srgbClr val="101010"/>
                 </a:solidFill>
-                <a:latin typeface="Helvetica Neue"/>
-              </a:rPr>
-              <a:t>An end-to-end pipeline that ingests an RGB GeoTIFF and emits validated GIS features.</a:t>
+                <a:latin typeface="Arial"/>
+              </a:rPr>
+              <a:t>Сквозной пайплайн: получает RGB GeoTIFF и выдаёт валидные ГИС-объекты.</a:t>
             </a:r>
           </a:p>
         </p:txBody>
@@ -4030,6 +4069,7 @@
           <a:lstStyle/>
           <a:p>
             <a:pPr algn="ctr"/>
+            <a:endParaRPr/>
           </a:p>
         </p:txBody>
       </p:sp>
@@ -4075,6 +4115,7 @@
           <a:lstStyle/>
           <a:p>
             <a:pPr algn="ctr"/>
+            <a:endParaRPr/>
           </a:p>
         </p:txBody>
       </p:sp>
@@ -4095,7 +4136,7 @@
           <a:noFill/>
         </p:spPr>
         <p:txBody>
-          <a:bodyPr wrap="square" lIns="109728" rIns="109728" tIns="73152" bIns="73152" anchor="t">
+          <a:bodyPr wrap="square" lIns="109728" tIns="73152" rIns="109728" bIns="73152" anchor="t">
             <a:spAutoFit/>
           </a:bodyPr>
           <a:lstStyle/>
@@ -4106,9 +4147,9 @@
                 <a:solidFill>
                   <a:srgbClr val="101010"/>
                 </a:solidFill>
-                <a:latin typeface="Helvetica Neue"/>
-              </a:rPr>
-              <a:t>Inputs</a:t>
+                <a:latin typeface="Arial"/>
+              </a:rPr>
+              <a:t>На вход</a:t>
             </a:r>
           </a:p>
         </p:txBody>
@@ -4130,7 +4171,7 @@
           <a:noFill/>
         </p:spPr>
         <p:txBody>
-          <a:bodyPr wrap="square" lIns="164592" rIns="164592" tIns="128016" bIns="128016" anchor="t">
+          <a:bodyPr wrap="square" lIns="164592" tIns="128016" rIns="164592" bIns="128016" anchor="t">
             <a:spAutoFit/>
           </a:bodyPr>
           <a:lstStyle/>
@@ -4145,9 +4186,9 @@
                 <a:solidFill>
                   <a:srgbClr val="101010"/>
                 </a:solidFill>
-                <a:latin typeface="Helvetica Neue"/>
-              </a:rPr>
-              <a:t>- 3-band RGB GeoTIFF</a:t>
+                <a:latin typeface="Arial"/>
+              </a:rPr>
+              <a:t>- 3-канальный RGB GeoTIFF</a:t>
             </a:r>
           </a:p>
           <a:p>
@@ -4161,9 +4202,9 @@
                 <a:solidFill>
                   <a:srgbClr val="101010"/>
                 </a:solidFill>
-                <a:latin typeface="Helvetica Neue"/>
-              </a:rPr>
-              <a:t>- Optional alpha for valid mask</a:t>
+                <a:latin typeface="Arial"/>
+              </a:rPr>
+              <a:t>- Опц. альфа-канал для маски</a:t>
             </a:r>
           </a:p>
           <a:p>
@@ -4177,9 +4218,9 @@
                 <a:solidFill>
                   <a:srgbClr val="101010"/>
                 </a:solidFill>
-                <a:latin typeface="Helvetica Neue"/>
-              </a:rPr>
-              <a:t>- Source CRS auto-detected</a:t>
+                <a:latin typeface="Arial"/>
+              </a:rPr>
+              <a:t>- Исходная СК определяется автоматически</a:t>
             </a:r>
           </a:p>
           <a:p>
@@ -4193,9 +4234,9 @@
                 <a:solidFill>
                   <a:srgbClr val="101010"/>
                 </a:solidFill>
-                <a:latin typeface="Helvetica Neue"/>
-              </a:rPr>
-              <a:t>- Almaty + Astana scenes</a:t>
+                <a:latin typeface="Arial"/>
+              </a:rPr>
+              <a:t>- Снимки Алматы и Астаны</a:t>
             </a:r>
           </a:p>
         </p:txBody>
@@ -4251,6 +4292,7 @@
           <a:lstStyle/>
           <a:p>
             <a:pPr algn="ctr"/>
+            <a:endParaRPr/>
           </a:p>
         </p:txBody>
       </p:sp>
@@ -4271,7 +4313,7 @@
           <a:noFill/>
         </p:spPr>
         <p:txBody>
-          <a:bodyPr wrap="square" lIns="109728" rIns="109728" tIns="73152" bIns="73152" anchor="t">
+          <a:bodyPr wrap="square" lIns="109728" tIns="73152" rIns="109728" bIns="73152" anchor="t">
             <a:spAutoFit/>
           </a:bodyPr>
           <a:lstStyle/>
@@ -4282,9 +4324,9 @@
                 <a:solidFill>
                   <a:srgbClr val="101010"/>
                 </a:solidFill>
-                <a:latin typeface="Helvetica Neue"/>
-              </a:rPr>
-              <a:t>Pipeline</a:t>
+                <a:latin typeface="Arial"/>
+              </a:rPr>
+              <a:t>Пайплайн</a:t>
             </a:r>
           </a:p>
         </p:txBody>
@@ -4306,7 +4348,7 @@
           <a:noFill/>
         </p:spPr>
         <p:txBody>
-          <a:bodyPr wrap="square" lIns="164592" rIns="164592" tIns="128016" bIns="128016" anchor="t">
+          <a:bodyPr wrap="square" lIns="164592" tIns="128016" rIns="164592" bIns="128016" anchor="t">
             <a:spAutoFit/>
           </a:bodyPr>
           <a:lstStyle/>
@@ -4321,9 +4363,9 @@
                 <a:solidFill>
                   <a:srgbClr val="101010"/>
                 </a:solidFill>
-                <a:latin typeface="Helvetica Neue"/>
-              </a:rPr>
-              <a:t>- 2048 px tiling, 64 px overlap</a:t>
+                <a:latin typeface="Arial"/>
+              </a:rPr>
+              <a:t>- Плитки 2048 px, нахлёст 64 px</a:t>
             </a:r>
           </a:p>
           <a:p>
@@ -4337,9 +4379,9 @@
                 <a:solidFill>
                   <a:srgbClr val="101010"/>
                 </a:solidFill>
-                <a:latin typeface="Helvetica Neue"/>
-              </a:rPr>
-              <a:t>- RGB indices + texture</a:t>
+                <a:latin typeface="Arial"/>
+              </a:rPr>
+              <a:t>- Индексы по RGB + текстура</a:t>
             </a:r>
           </a:p>
           <a:p>
@@ -4353,9 +4395,9 @@
                 <a:solidFill>
                   <a:srgbClr val="101010"/>
                 </a:solidFill>
-                <a:latin typeface="Helvetica Neue"/>
-              </a:rPr>
-              <a:t>- Rule-based classification</a:t>
+                <a:latin typeface="Arial"/>
+              </a:rPr>
+              <a:t>- Классификация по правилам</a:t>
             </a:r>
           </a:p>
           <a:p>
@@ -4369,9 +4411,9 @@
                 <a:solidFill>
                   <a:srgbClr val="101010"/>
                 </a:solidFill>
-                <a:latin typeface="Helvetica Neue"/>
-              </a:rPr>
-              <a:t>- Vectorize + dissolve + simplify</a:t>
+                <a:latin typeface="Arial"/>
+              </a:rPr>
+              <a:t>- Векторизация + слияние + упрощение</a:t>
             </a:r>
           </a:p>
         </p:txBody>
@@ -4427,6 +4469,7 @@
           <a:lstStyle/>
           <a:p>
             <a:pPr algn="ctr"/>
+            <a:endParaRPr/>
           </a:p>
         </p:txBody>
       </p:sp>
@@ -4472,6 +4515,7 @@
           <a:lstStyle/>
           <a:p>
             <a:pPr algn="ctr"/>
+            <a:endParaRPr/>
           </a:p>
         </p:txBody>
       </p:sp>
@@ -4492,7 +4536,7 @@
           <a:noFill/>
         </p:spPr>
         <p:txBody>
-          <a:bodyPr wrap="square" lIns="109728" rIns="109728" tIns="73152" bIns="73152" anchor="t">
+          <a:bodyPr wrap="square" lIns="109728" tIns="73152" rIns="109728" bIns="73152" anchor="t">
             <a:spAutoFit/>
           </a:bodyPr>
           <a:lstStyle/>
@@ -4503,9 +4547,9 @@
                 <a:solidFill>
                   <a:srgbClr val="101010"/>
                 </a:solidFill>
-                <a:latin typeface="Helvetica Neue"/>
-              </a:rPr>
-              <a:t>Outputs</a:t>
+                <a:latin typeface="Arial"/>
+              </a:rPr>
+              <a:t>На выходе</a:t>
             </a:r>
           </a:p>
         </p:txBody>
@@ -4527,7 +4571,7 @@
           <a:noFill/>
         </p:spPr>
         <p:txBody>
-          <a:bodyPr wrap="square" lIns="164592" rIns="164592" tIns="128016" bIns="128016" anchor="t">
+          <a:bodyPr wrap="square" lIns="164592" tIns="128016" rIns="164592" bIns="128016" anchor="t">
             <a:spAutoFit/>
           </a:bodyPr>
           <a:lstStyle/>
@@ -4542,7 +4586,7 @@
                 <a:solidFill>
                   <a:srgbClr val="101010"/>
                 </a:solidFill>
-                <a:latin typeface="Helvetica Neue"/>
+                <a:latin typeface="Arial"/>
               </a:rPr>
               <a:t>- GeoJSON (RFC 7946, EPSG:4326)</a:t>
             </a:r>
@@ -4558,9 +4602,9 @@
                 <a:solidFill>
                   <a:srgbClr val="101010"/>
                 </a:solidFill>
-                <a:latin typeface="Helvetica Neue"/>
-              </a:rPr>
-              <a:t>- GeoPackage (Polygon / Line / Point layers)</a:t>
+                <a:latin typeface="Arial"/>
+              </a:rPr>
+              <a:t>- GeoPackage (слои Polygon / Line / Point)</a:t>
             </a:r>
           </a:p>
           <a:p>
@@ -4574,9 +4618,9 @@
                 <a:solidFill>
                   <a:srgbClr val="101010"/>
                 </a:solidFill>
-                <a:latin typeface="Helvetica Neue"/>
-              </a:rPr>
-              <a:t>- summary.csv per scene</a:t>
+                <a:latin typeface="Arial"/>
+              </a:rPr>
+              <a:t>- summary.csv по каждому снимку</a:t>
             </a:r>
           </a:p>
           <a:p>
@@ -4590,9 +4634,9 @@
                 <a:solidFill>
                   <a:srgbClr val="101010"/>
                 </a:solidFill>
-                <a:latin typeface="Helvetica Neue"/>
-              </a:rPr>
-              <a:t>- Overlay PNG previews</a:t>
+                <a:latin typeface="Arial"/>
+              </a:rPr>
+              <a:t>- PNG-превью с наложением</a:t>
             </a:r>
           </a:p>
         </p:txBody>
@@ -4606,7 +4650,7 @@
         <p:spPr>
           <a:xfrm>
             <a:off x="502920" y="6446520"/>
-            <a:ext cx="7315200" cy="274320"/>
+            <a:ext cx="7315200" cy="286232"/>
           </a:xfrm>
           <a:prstGeom prst="rect">
             <a:avLst/>
@@ -4614,20 +4658,47 @@
           <a:noFill/>
         </p:spPr>
         <p:txBody>
-          <a:bodyPr wrap="square" lIns="109728" rIns="109728" tIns="73152" bIns="73152" anchor="t">
+          <a:bodyPr wrap="square" lIns="109728" tIns="73152" rIns="109728" bIns="73152" anchor="t">
             <a:spAutoFit/>
           </a:bodyPr>
           <a:lstStyle/>
           <a:p>
             <a:pPr algn="l"/>
             <a:r>
-              <a:rPr sz="900" b="0">
+              <a:rPr sz="900" b="0" dirty="0" err="1">
                 <a:solidFill>
                   <a:srgbClr val="808080"/>
                 </a:solidFill>
-                <a:latin typeface="Helvetica Neue"/>
-              </a:rPr>
-              <a:t>NURIS Prototype  -  HackNU '26</a:t>
+                <a:latin typeface="Arial"/>
+              </a:rPr>
+              <a:t>Прототип</a:t>
+            </a:r>
+            <a:r>
+              <a:rPr sz="900" b="0" dirty="0">
+                <a:solidFill>
+                  <a:srgbClr val="808080"/>
+                </a:solidFill>
+                <a:latin typeface="Arial"/>
+              </a:rPr>
+              <a:t> NURIS  -  </a:t>
+            </a:r>
+            <a:r>
+              <a:rPr lang="en-US" sz="900" dirty="0" err="1">
+                <a:solidFill>
+                  <a:srgbClr val="808080"/>
+                </a:solidFill>
+                <a:latin typeface="Arial"/>
+              </a:rPr>
+              <a:t>DropOuts</a:t>
+            </a:r>
+            <a:r>
+              <a:rPr sz="900" b="0" dirty="0">
+                <a:solidFill>
+                  <a:srgbClr val="808080"/>
+                </a:solidFill>
+                <a:latin typeface="Arial"/>
+              </a:rPr>
+              <a:t> '26</a:t>
             </a:r>
           </a:p>
         </p:txBody>
@@ -4641,7 +4712,7 @@
 </file>
 
 <file path=ppt/slides/slide3.xml><?xml version="1.0" encoding="utf-8"?>
-<p:sld xmlns:a="http://schemas.openxmlformats.org/drawingml/2006/main" xmlns:p="http://schemas.openxmlformats.org/presentationml/2006/main" xmlns:r="http://schemas.openxmlformats.org/officeDocument/2006/relationships">
+<p:sld xmlns:a="http://schemas.openxmlformats.org/drawingml/2006/main" xmlns:r="http://schemas.openxmlformats.org/officeDocument/2006/relationships" xmlns:p="http://schemas.openxmlformats.org/presentationml/2006/main">
   <p:cSld>
     <p:spTree>
       <p:nvGrpSpPr>
@@ -4649,7 +4720,14 @@
         <p:cNvGrpSpPr/>
         <p:nvPr/>
       </p:nvGrpSpPr>
-      <p:grpSpPr/>
+      <p:grpSpPr>
+        <a:xfrm>
+          <a:off x="0" y="0"/>
+          <a:ext cx="0" cy="0"/>
+          <a:chOff x="0" y="0"/>
+          <a:chExt cx="0" cy="0"/>
+        </a:xfrm>
+      </p:grpSpPr>
       <p:sp>
         <p:nvSpPr>
           <p:cNvPr id="2" name="Rectangle 1"/>
@@ -4691,6 +4769,7 @@
           <a:lstStyle/>
           <a:p>
             <a:pPr algn="ctr"/>
+            <a:endParaRPr/>
           </a:p>
         </p:txBody>
       </p:sp>
@@ -4703,7 +4782,7 @@
         <p:spPr>
           <a:xfrm>
             <a:off x="502920" y="411480"/>
-            <a:ext cx="7315200" cy="502920"/>
+            <a:ext cx="9144000" cy="502920"/>
           </a:xfrm>
           <a:prstGeom prst="rect">
             <a:avLst/>
@@ -4711,7 +4790,7 @@
           <a:noFill/>
         </p:spPr>
         <p:txBody>
-          <a:bodyPr wrap="square" lIns="109728" rIns="109728" tIns="73152" bIns="73152" anchor="ctr">
+          <a:bodyPr wrap="square" lIns="109728" tIns="73152" rIns="109728" bIns="73152" anchor="ctr">
             <a:spAutoFit/>
           </a:bodyPr>
           <a:lstStyle/>
@@ -4722,9 +4801,9 @@
                 <a:solidFill>
                   <a:srgbClr val="101010"/>
                 </a:solidFill>
-                <a:latin typeface="Helvetica Neue"/>
-              </a:rPr>
-              <a:t>PIPELINE ARCHITECTURE</a:t>
+                <a:latin typeface="Arial"/>
+              </a:rPr>
+              <a:t>АРХИТЕКТУРА ПАЙПЛАЙНА</a:t>
             </a:r>
           </a:p>
         </p:txBody>
@@ -4769,6 +4848,7 @@
           <a:lstStyle/>
           <a:p>
             <a:pPr algn="ctr"/>
+            <a:endParaRPr/>
           </a:p>
         </p:txBody>
       </p:sp>
@@ -4810,7 +4890,7 @@
           </a:fontRef>
         </p:style>
         <p:txBody>
-          <a:bodyPr rtlCol="0" anchor="ctr" wrap="square" lIns="109728" rIns="109728" tIns="73152" bIns="73152"/>
+          <a:bodyPr wrap="square" lIns="109728" tIns="73152" rIns="109728" bIns="73152" rtlCol="0" anchor="ctr"/>
           <a:lstStyle/>
           <a:p>
             <a:pPr algn="ctr"/>
@@ -4819,7 +4899,7 @@
                 <a:solidFill>
                   <a:srgbClr val="C8F23E"/>
                 </a:solidFill>
-                <a:latin typeface="Helvetica Neue"/>
+                <a:latin typeface="Arial"/>
               </a:rPr>
               <a:t>03 / 09</a:t>
             </a:r>
@@ -4877,6 +4957,7 @@
           <a:lstStyle/>
           <a:p>
             <a:pPr algn="ctr"/>
+            <a:endParaRPr/>
           </a:p>
         </p:txBody>
       </p:sp>
@@ -4897,7 +4978,7 @@
           <a:noFill/>
         </p:spPr>
         <p:txBody>
-          <a:bodyPr wrap="square" lIns="109728" rIns="109728" tIns="73152" bIns="73152" anchor="t">
+          <a:bodyPr wrap="square" lIns="109728" tIns="73152" rIns="109728" bIns="73152" anchor="t">
             <a:spAutoFit/>
           </a:bodyPr>
           <a:lstStyle/>
@@ -4908,7 +4989,7 @@
                 <a:solidFill>
                   <a:srgbClr val="808080"/>
                 </a:solidFill>
-                <a:latin typeface="Helvetica Neue"/>
+                <a:latin typeface="Arial"/>
               </a:rPr>
               <a:t>01</a:t>
             </a:r>
@@ -4932,20 +5013,20 @@
           <a:noFill/>
         </p:spPr>
         <p:txBody>
-          <a:bodyPr wrap="square" lIns="109728" rIns="109728" tIns="73152" bIns="73152" anchor="t">
+          <a:bodyPr wrap="square" lIns="109728" tIns="73152" rIns="109728" bIns="73152" anchor="t">
             <a:spAutoFit/>
           </a:bodyPr>
           <a:lstStyle/>
           <a:p>
             <a:pPr algn="l"/>
             <a:r>
-              <a:rPr sz="2600" b="1">
-                <a:solidFill>
-                  <a:srgbClr val="101010"/>
-                </a:solidFill>
-                <a:latin typeface="Helvetica Neue"/>
-              </a:rPr>
-              <a:t>Tile</a:t>
+              <a:rPr sz="2400" b="1">
+                <a:solidFill>
+                  <a:srgbClr val="101010"/>
+                </a:solidFill>
+                <a:latin typeface="Arial"/>
+              </a:rPr>
+              <a:t>Плитки</a:t>
             </a:r>
           </a:p>
         </p:txBody>
@@ -4967,7 +5048,7 @@
           <a:noFill/>
         </p:spPr>
         <p:txBody>
-          <a:bodyPr wrap="square" lIns="164592" rIns="164592" tIns="128016" bIns="128016" anchor="t">
+          <a:bodyPr wrap="square" lIns="164592" tIns="128016" rIns="164592" bIns="128016" anchor="t">
             <a:spAutoFit/>
           </a:bodyPr>
           <a:lstStyle/>
@@ -4982,7 +5063,7 @@
                 <a:solidFill>
                   <a:srgbClr val="101010"/>
                 </a:solidFill>
-                <a:latin typeface="Helvetica Neue"/>
+                <a:latin typeface="Arial"/>
               </a:rPr>
               <a:t>iter_windows()</a:t>
             </a:r>
@@ -4998,9 +5079,9 @@
                 <a:solidFill>
                   <a:srgbClr val="101010"/>
                 </a:solidFill>
-                <a:latin typeface="Helvetica Neue"/>
-              </a:rPr>
-              <a:t>2048 px, 64 px overlap</a:t>
+                <a:latin typeface="Arial"/>
+              </a:rPr>
+              <a:t>2048 px, нахлёст 64 px</a:t>
             </a:r>
           </a:p>
         </p:txBody>
@@ -5056,6 +5137,7 @@
           <a:lstStyle/>
           <a:p>
             <a:pPr algn="ctr"/>
+            <a:endParaRPr/>
           </a:p>
         </p:txBody>
       </p:sp>
@@ -5076,7 +5158,7 @@
           <a:noFill/>
         </p:spPr>
         <p:txBody>
-          <a:bodyPr wrap="square" lIns="109728" rIns="109728" tIns="73152" bIns="73152" anchor="t">
+          <a:bodyPr wrap="square" lIns="109728" tIns="73152" rIns="109728" bIns="73152" anchor="t">
             <a:spAutoFit/>
           </a:bodyPr>
           <a:lstStyle/>
@@ -5087,7 +5169,7 @@
                 <a:solidFill>
                   <a:srgbClr val="101010"/>
                 </a:solidFill>
-                <a:latin typeface="Helvetica Neue"/>
+                <a:latin typeface="Arial"/>
               </a:rPr>
               <a:t>02</a:t>
             </a:r>
@@ -5111,20 +5193,20 @@
           <a:noFill/>
         </p:spPr>
         <p:txBody>
-          <a:bodyPr wrap="square" lIns="109728" rIns="109728" tIns="73152" bIns="73152" anchor="t">
+          <a:bodyPr wrap="square" lIns="109728" tIns="73152" rIns="109728" bIns="73152" anchor="t">
             <a:spAutoFit/>
           </a:bodyPr>
           <a:lstStyle/>
           <a:p>
             <a:pPr algn="l"/>
             <a:r>
-              <a:rPr sz="2600" b="1">
-                <a:solidFill>
-                  <a:srgbClr val="101010"/>
-                </a:solidFill>
-                <a:latin typeface="Helvetica Neue"/>
-              </a:rPr>
-              <a:t>Classify</a:t>
+              <a:rPr sz="2400" b="1">
+                <a:solidFill>
+                  <a:srgbClr val="101010"/>
+                </a:solidFill>
+                <a:latin typeface="Arial"/>
+              </a:rPr>
+              <a:t>Классиф.</a:t>
             </a:r>
           </a:p>
         </p:txBody>
@@ -5146,7 +5228,7 @@
           <a:noFill/>
         </p:spPr>
         <p:txBody>
-          <a:bodyPr wrap="square" lIns="164592" rIns="164592" tIns="128016" bIns="128016" anchor="t">
+          <a:bodyPr wrap="square" lIns="164592" tIns="128016" rIns="164592" bIns="128016" anchor="t">
             <a:spAutoFit/>
           </a:bodyPr>
           <a:lstStyle/>
@@ -5161,7 +5243,7 @@
                 <a:solidFill>
                   <a:srgbClr val="101010"/>
                 </a:solidFill>
-                <a:latin typeface="Helvetica Neue"/>
+                <a:latin typeface="Arial"/>
               </a:rPr>
               <a:t>VARI, blue-ratio,</a:t>
             </a:r>
@@ -5177,9 +5259,9 @@
                 <a:solidFill>
                   <a:srgbClr val="101010"/>
                 </a:solidFill>
-                <a:latin typeface="Helvetica Neue"/>
-              </a:rPr>
-              <a:t>brightness, texture</a:t>
+                <a:latin typeface="Arial"/>
+              </a:rPr>
+              <a:t>яркость, текстура</a:t>
             </a:r>
           </a:p>
         </p:txBody>
@@ -5235,6 +5317,7 @@
           <a:lstStyle/>
           <a:p>
             <a:pPr algn="ctr"/>
+            <a:endParaRPr/>
           </a:p>
         </p:txBody>
       </p:sp>
@@ -5255,7 +5338,7 @@
           <a:noFill/>
         </p:spPr>
         <p:txBody>
-          <a:bodyPr wrap="square" lIns="109728" rIns="109728" tIns="73152" bIns="73152" anchor="t">
+          <a:bodyPr wrap="square" lIns="109728" tIns="73152" rIns="109728" bIns="73152" anchor="t">
             <a:spAutoFit/>
           </a:bodyPr>
           <a:lstStyle/>
@@ -5266,7 +5349,7 @@
                 <a:solidFill>
                   <a:srgbClr val="808080"/>
                 </a:solidFill>
-                <a:latin typeface="Helvetica Neue"/>
+                <a:latin typeface="Arial"/>
               </a:rPr>
               <a:t>03</a:t>
             </a:r>
@@ -5290,20 +5373,20 @@
           <a:noFill/>
         </p:spPr>
         <p:txBody>
-          <a:bodyPr wrap="square" lIns="109728" rIns="109728" tIns="73152" bIns="73152" anchor="t">
+          <a:bodyPr wrap="square" lIns="109728" tIns="73152" rIns="109728" bIns="73152" anchor="t">
             <a:spAutoFit/>
           </a:bodyPr>
           <a:lstStyle/>
           <a:p>
             <a:pPr algn="l"/>
             <a:r>
-              <a:rPr sz="2600" b="1">
-                <a:solidFill>
-                  <a:srgbClr val="101010"/>
-                </a:solidFill>
-                <a:latin typeface="Helvetica Neue"/>
-              </a:rPr>
-              <a:t>Vectorize</a:t>
+              <a:rPr sz="2400" b="1">
+                <a:solidFill>
+                  <a:srgbClr val="101010"/>
+                </a:solidFill>
+                <a:latin typeface="Arial"/>
+              </a:rPr>
+              <a:t>Вектор</a:t>
             </a:r>
           </a:p>
         </p:txBody>
@@ -5325,7 +5408,7 @@
           <a:noFill/>
         </p:spPr>
         <p:txBody>
-          <a:bodyPr wrap="square" lIns="164592" rIns="164592" tIns="128016" bIns="128016" anchor="t">
+          <a:bodyPr wrap="square" lIns="164592" tIns="128016" rIns="164592" bIns="128016" anchor="t">
             <a:spAutoFit/>
           </a:bodyPr>
           <a:lstStyle/>
@@ -5340,9 +5423,9 @@
                 <a:solidFill>
                   <a:srgbClr val="101010"/>
                 </a:solidFill>
-                <a:latin typeface="Helvetica Neue"/>
-              </a:rPr>
-              <a:t>raster -&gt; polygons,</a:t>
+                <a:latin typeface="Arial"/>
+              </a:rPr>
+              <a:t>растр -&gt; полигоны,</a:t>
             </a:r>
           </a:p>
           <a:p>
@@ -5356,9 +5439,9 @@
                 <a:solidFill>
                   <a:srgbClr val="101010"/>
                 </a:solidFill>
-                <a:latin typeface="Helvetica Neue"/>
-              </a:rPr>
-              <a:t>skeleton -&gt; lines</a:t>
+                <a:latin typeface="Arial"/>
+              </a:rPr>
+              <a:t>скелет -&gt; линии</a:t>
             </a:r>
           </a:p>
         </p:txBody>
@@ -5414,6 +5497,7 @@
           <a:lstStyle/>
           <a:p>
             <a:pPr algn="ctr"/>
+            <a:endParaRPr/>
           </a:p>
         </p:txBody>
       </p:sp>
@@ -5434,7 +5518,7 @@
           <a:noFill/>
         </p:spPr>
         <p:txBody>
-          <a:bodyPr wrap="square" lIns="109728" rIns="109728" tIns="73152" bIns="73152" anchor="t">
+          <a:bodyPr wrap="square" lIns="109728" tIns="73152" rIns="109728" bIns="73152" anchor="t">
             <a:spAutoFit/>
           </a:bodyPr>
           <a:lstStyle/>
@@ -5445,7 +5529,7 @@
                 <a:solidFill>
                   <a:srgbClr val="101010"/>
                 </a:solidFill>
-                <a:latin typeface="Helvetica Neue"/>
+                <a:latin typeface="Arial"/>
               </a:rPr>
               <a:t>04</a:t>
             </a:r>
@@ -5469,20 +5553,20 @@
           <a:noFill/>
         </p:spPr>
         <p:txBody>
-          <a:bodyPr wrap="square" lIns="109728" rIns="109728" tIns="73152" bIns="73152" anchor="t">
+          <a:bodyPr wrap="square" lIns="109728" tIns="73152" rIns="109728" bIns="73152" anchor="t">
             <a:spAutoFit/>
           </a:bodyPr>
           <a:lstStyle/>
           <a:p>
             <a:pPr algn="l"/>
             <a:r>
-              <a:rPr sz="2600" b="1">
-                <a:solidFill>
-                  <a:srgbClr val="101010"/>
-                </a:solidFill>
-                <a:latin typeface="Helvetica Neue"/>
-              </a:rPr>
-              <a:t>Merge</a:t>
+              <a:rPr sz="2400" b="1">
+                <a:solidFill>
+                  <a:srgbClr val="101010"/>
+                </a:solidFill>
+                <a:latin typeface="Arial"/>
+              </a:rPr>
+              <a:t>Слияние</a:t>
             </a:r>
           </a:p>
         </p:txBody>
@@ -5504,7 +5588,7 @@
           <a:noFill/>
         </p:spPr>
         <p:txBody>
-          <a:bodyPr wrap="square" lIns="164592" rIns="164592" tIns="128016" bIns="128016" anchor="t">
+          <a:bodyPr wrap="square" lIns="164592" tIns="128016" rIns="164592" bIns="128016" anchor="t">
             <a:spAutoFit/>
           </a:bodyPr>
           <a:lstStyle/>
@@ -5519,9 +5603,9 @@
                 <a:solidFill>
                   <a:srgbClr val="101010"/>
                 </a:solidFill>
-                <a:latin typeface="Helvetica Neue"/>
-              </a:rPr>
-              <a:t>unary_union, dissolve,</a:t>
+                <a:latin typeface="Arial"/>
+              </a:rPr>
+              <a:t>unary_union, дедуп,</a:t>
             </a:r>
           </a:p>
           <a:p>
@@ -5535,9 +5619,9 @@
                 <a:solidFill>
                   <a:srgbClr val="101010"/>
                 </a:solidFill>
-                <a:latin typeface="Helvetica Neue"/>
-              </a:rPr>
-              <a:t>simplify in metric CRS</a:t>
+                <a:latin typeface="Arial"/>
+              </a:rPr>
+              <a:t>упрощение в метрах</a:t>
             </a:r>
           </a:p>
         </p:txBody>
@@ -5593,6 +5677,7 @@
           <a:lstStyle/>
           <a:p>
             <a:pPr algn="ctr"/>
+            <a:endParaRPr/>
           </a:p>
         </p:txBody>
       </p:sp>
@@ -5613,7 +5698,7 @@
           <a:noFill/>
         </p:spPr>
         <p:txBody>
-          <a:bodyPr wrap="square" lIns="109728" rIns="109728" tIns="73152" bIns="73152" anchor="t">
+          <a:bodyPr wrap="square" lIns="109728" tIns="73152" rIns="109728" bIns="73152" anchor="t">
             <a:spAutoFit/>
           </a:bodyPr>
           <a:lstStyle/>
@@ -5624,7 +5709,7 @@
                 <a:solidFill>
                   <a:srgbClr val="808080"/>
                 </a:solidFill>
-                <a:latin typeface="Helvetica Neue"/>
+                <a:latin typeface="Arial"/>
               </a:rPr>
               <a:t>05</a:t>
             </a:r>
@@ -5648,20 +5733,20 @@
           <a:noFill/>
         </p:spPr>
         <p:txBody>
-          <a:bodyPr wrap="square" lIns="109728" rIns="109728" tIns="73152" bIns="73152" anchor="t">
+          <a:bodyPr wrap="square" lIns="109728" tIns="73152" rIns="109728" bIns="73152" anchor="t">
             <a:spAutoFit/>
           </a:bodyPr>
           <a:lstStyle/>
           <a:p>
             <a:pPr algn="l"/>
             <a:r>
-              <a:rPr sz="2600" b="1">
-                <a:solidFill>
-                  <a:srgbClr val="101010"/>
-                </a:solidFill>
-                <a:latin typeface="Helvetica Neue"/>
-              </a:rPr>
-              <a:t>Export</a:t>
+              <a:rPr sz="2400" b="1">
+                <a:solidFill>
+                  <a:srgbClr val="101010"/>
+                </a:solidFill>
+                <a:latin typeface="Arial"/>
+              </a:rPr>
+              <a:t>Экспорт</a:t>
             </a:r>
           </a:p>
         </p:txBody>
@@ -5683,7 +5768,7 @@
           <a:noFill/>
         </p:spPr>
         <p:txBody>
-          <a:bodyPr wrap="square" lIns="164592" rIns="164592" tIns="128016" bIns="128016" anchor="t">
+          <a:bodyPr wrap="square" lIns="164592" tIns="128016" rIns="164592" bIns="128016" anchor="t">
             <a:spAutoFit/>
           </a:bodyPr>
           <a:lstStyle/>
@@ -5698,7 +5783,7 @@
                 <a:solidFill>
                   <a:srgbClr val="101010"/>
                 </a:solidFill>
-                <a:latin typeface="Helvetica Neue"/>
+                <a:latin typeface="Arial"/>
               </a:rPr>
               <a:t>RFC 7946 GeoJSON,</a:t>
             </a:r>
@@ -5714,7 +5799,7 @@
                 <a:solidFill>
                   <a:srgbClr val="101010"/>
                 </a:solidFill>
-                <a:latin typeface="Helvetica Neue"/>
+                <a:latin typeface="Arial"/>
               </a:rPr>
               <a:t>.gpkg, summary.csv</a:t>
             </a:r>
@@ -5738,7 +5823,7 @@
           <a:noFill/>
         </p:spPr>
         <p:txBody>
-          <a:bodyPr wrap="square" lIns="164592" rIns="164592" tIns="128016" bIns="128016" anchor="t">
+          <a:bodyPr wrap="square" lIns="164592" tIns="128016" rIns="164592" bIns="128016" anchor="t">
             <a:spAutoFit/>
           </a:bodyPr>
           <a:lstStyle/>
@@ -5753,9 +5838,9 @@
                 <a:solidFill>
                   <a:srgbClr val="101010"/>
                 </a:solidFill>
-                <a:latin typeface="Helvetica Neue"/>
-              </a:rPr>
-              <a:t>Reproducible: single CLI invocation</a:t>
+                <a:latin typeface="Arial"/>
+              </a:rPr>
+              <a:t>Воспроизводится одной командой:</a:t>
             </a:r>
           </a:p>
           <a:p>
@@ -5769,9 +5854,9 @@
                 <a:solidFill>
                   <a:srgbClr val="101010"/>
                 </a:solidFill>
-                <a:latin typeface="Helvetica Neue"/>
-              </a:rPr>
-              <a:t>python run.py --inputs &lt;folder&gt; --out outputs/</a:t>
+                <a:latin typeface="Arial"/>
+              </a:rPr>
+              <a:t>python run.py --inputs &lt;папка&gt; --out outputs/</a:t>
             </a:r>
           </a:p>
           <a:p>
@@ -5785,9 +5870,9 @@
                 <a:solidFill>
                   <a:srgbClr val="101010"/>
                 </a:solidFill>
-                <a:latin typeface="Helvetica Neue"/>
-              </a:rPr>
-              <a:t>Validated geometries via shapely.make_valid + RHR orientation; coordinates quantized to 7 decimals.</a:t>
+                <a:latin typeface="Arial"/>
+              </a:rPr>
+              <a:t>Геометрии валидируются через shapely.make_valid и ориентацию RHR; координаты округляются до 7 знаков.</a:t>
             </a:r>
           </a:p>
         </p:txBody>
@@ -5801,7 +5886,7 @@
         <p:spPr>
           <a:xfrm>
             <a:off x="502920" y="6446520"/>
-            <a:ext cx="7315200" cy="274320"/>
+            <a:ext cx="7315200" cy="286232"/>
           </a:xfrm>
           <a:prstGeom prst="rect">
             <a:avLst/>
@@ -5809,20 +5894,46 @@
           <a:noFill/>
         </p:spPr>
         <p:txBody>
-          <a:bodyPr wrap="square" lIns="109728" rIns="109728" tIns="73152" bIns="73152" anchor="t">
+          <a:bodyPr wrap="square" lIns="109728" tIns="73152" rIns="109728" bIns="73152" anchor="t">
             <a:spAutoFit/>
           </a:bodyPr>
           <a:lstStyle/>
           <a:p>
-            <a:pPr algn="l"/>
-            <a:r>
-              <a:rPr sz="900" b="0">
+            <a:r>
+              <a:rPr lang="ru-RU" sz="900" dirty="0">
                 <a:solidFill>
                   <a:srgbClr val="808080"/>
                 </a:solidFill>
-                <a:latin typeface="Helvetica Neue"/>
-              </a:rPr>
-              <a:t>NURIS Prototype  -  HackNU '26</a:t>
+                <a:latin typeface="Arial"/>
+              </a:rPr>
+              <a:t>Прототип </a:t>
+            </a:r>
+            <a:r>
+              <a:rPr lang="en-US" sz="900" dirty="0">
+                <a:solidFill>
+                  <a:srgbClr val="808080"/>
+                </a:solidFill>
+                <a:latin typeface="Arial"/>
+              </a:rPr>
+              <a:t>NURIS  -  </a:t>
+            </a:r>
+            <a:r>
+              <a:rPr lang="en-US" sz="900" dirty="0" err="1">
+                <a:solidFill>
+                  <a:srgbClr val="808080"/>
+                </a:solidFill>
+                <a:latin typeface="Arial"/>
+              </a:rPr>
+              <a:t>DropOuts</a:t>
+            </a:r>
+            <a:r>
+              <a:rPr lang="en-US" sz="900" dirty="0">
+                <a:solidFill>
+                  <a:srgbClr val="808080"/>
+                </a:solidFill>
+                <a:latin typeface="Arial"/>
+              </a:rPr>
+              <a:t> '26</a:t>
             </a:r>
           </a:p>
         </p:txBody>
@@ -5836,7 +5947,7 @@
 </file>
 
 <file path=ppt/slides/slide4.xml><?xml version="1.0" encoding="utf-8"?>
-<p:sld xmlns:a="http://schemas.openxmlformats.org/drawingml/2006/main" xmlns:p="http://schemas.openxmlformats.org/presentationml/2006/main" xmlns:r="http://schemas.openxmlformats.org/officeDocument/2006/relationships">
+<p:sld xmlns:a="http://schemas.openxmlformats.org/drawingml/2006/main" xmlns:r="http://schemas.openxmlformats.org/officeDocument/2006/relationships" xmlns:p="http://schemas.openxmlformats.org/presentationml/2006/main">
   <p:cSld>
     <p:spTree>
       <p:nvGrpSpPr>
@@ -5844,7 +5955,14 @@
         <p:cNvGrpSpPr/>
         <p:nvPr/>
       </p:nvGrpSpPr>
-      <p:grpSpPr/>
+      <p:grpSpPr>
+        <a:xfrm>
+          <a:off x="0" y="0"/>
+          <a:ext cx="0" cy="0"/>
+          <a:chOff x="0" y="0"/>
+          <a:chExt cx="0" cy="0"/>
+        </a:xfrm>
+      </p:grpSpPr>
       <p:sp>
         <p:nvSpPr>
           <p:cNvPr id="2" name="Rectangle 1"/>
@@ -5886,6 +6004,7 @@
           <a:lstStyle/>
           <a:p>
             <a:pPr algn="ctr"/>
+            <a:endParaRPr/>
           </a:p>
         </p:txBody>
       </p:sp>
@@ -5898,7 +6017,7 @@
         <p:spPr>
           <a:xfrm>
             <a:off x="502920" y="411480"/>
-            <a:ext cx="7315200" cy="502920"/>
+            <a:ext cx="9144000" cy="502920"/>
           </a:xfrm>
           <a:prstGeom prst="rect">
             <a:avLst/>
@@ -5906,7 +6025,7 @@
           <a:noFill/>
         </p:spPr>
         <p:txBody>
-          <a:bodyPr wrap="square" lIns="109728" rIns="109728" tIns="73152" bIns="73152" anchor="ctr">
+          <a:bodyPr wrap="square" lIns="109728" tIns="73152" rIns="109728" bIns="73152" anchor="ctr">
             <a:spAutoFit/>
           </a:bodyPr>
           <a:lstStyle/>
@@ -5917,9 +6036,9 @@
                 <a:solidFill>
                   <a:srgbClr val="101010"/>
                 </a:solidFill>
-                <a:latin typeface="Helvetica Neue"/>
-              </a:rPr>
-              <a:t>OUTPUT SCHEMA</a:t>
+                <a:latin typeface="Arial"/>
+              </a:rPr>
+              <a:t>СХЕМА ВЫХОДНЫХ ДАННЫХ</a:t>
             </a:r>
           </a:p>
         </p:txBody>
@@ -5964,6 +6083,7 @@
           <a:lstStyle/>
           <a:p>
             <a:pPr algn="ctr"/>
+            <a:endParaRPr/>
           </a:p>
         </p:txBody>
       </p:sp>
@@ -6005,7 +6125,7 @@
           </a:fontRef>
         </p:style>
         <p:txBody>
-          <a:bodyPr rtlCol="0" anchor="ctr" wrap="square" lIns="109728" rIns="109728" tIns="73152" bIns="73152"/>
+          <a:bodyPr wrap="square" lIns="109728" tIns="73152" rIns="109728" bIns="73152" rtlCol="0" anchor="ctr"/>
           <a:lstStyle/>
           <a:p>
             <a:pPr algn="ctr"/>
@@ -6014,7 +6134,7 @@
                 <a:solidFill>
                   <a:srgbClr val="C8F23E"/>
                 </a:solidFill>
-                <a:latin typeface="Helvetica Neue"/>
+                <a:latin typeface="Arial"/>
               </a:rPr>
               <a:t>04 / 09</a:t>
             </a:r>
@@ -6072,6 +6192,7 @@
           <a:lstStyle/>
           <a:p>
             <a:pPr algn="ctr"/>
+            <a:endParaRPr/>
           </a:p>
         </p:txBody>
       </p:sp>
@@ -6117,6 +6238,7 @@
           <a:lstStyle/>
           <a:p>
             <a:pPr algn="ctr"/>
+            <a:endParaRPr/>
           </a:p>
         </p:txBody>
       </p:sp>
@@ -6137,7 +6259,7 @@
           <a:noFill/>
         </p:spPr>
         <p:txBody>
-          <a:bodyPr wrap="square" lIns="109728" rIns="109728" tIns="73152" bIns="73152" anchor="t">
+          <a:bodyPr wrap="square" lIns="109728" tIns="73152" rIns="109728" bIns="73152" anchor="t">
             <a:spAutoFit/>
           </a:bodyPr>
           <a:lstStyle/>
@@ -6148,9 +6270,9 @@
                 <a:solidFill>
                   <a:srgbClr val="101010"/>
                 </a:solidFill>
-                <a:latin typeface="Helvetica Neue"/>
-              </a:rPr>
-              <a:t>Per-feature attributes</a:t>
+                <a:latin typeface="Arial"/>
+              </a:rPr>
+              <a:t>Атрибуты объекта</a:t>
             </a:r>
           </a:p>
         </p:txBody>
@@ -6172,7 +6294,7 @@
           <a:noFill/>
         </p:spPr>
         <p:txBody>
-          <a:bodyPr wrap="square" lIns="164592" rIns="164592" tIns="128016" bIns="128016" anchor="t">
+          <a:bodyPr wrap="square" lIns="164592" tIns="128016" rIns="164592" bIns="128016" anchor="t">
             <a:spAutoFit/>
           </a:bodyPr>
           <a:lstStyle/>
@@ -6187,9 +6309,9 @@
                 <a:solidFill>
                   <a:srgbClr val="101010"/>
                 </a:solidFill>
-                <a:latin typeface="Helvetica Neue"/>
-              </a:rPr>
-              <a:t>id            stable feature id</a:t>
+                <a:latin typeface="Arial"/>
+              </a:rPr>
+              <a:t>id            уникальный id объекта</a:t>
             </a:r>
           </a:p>
           <a:p>
@@ -6203,7 +6325,7 @@
                 <a:solidFill>
                   <a:srgbClr val="101010"/>
                 </a:solidFill>
-                <a:latin typeface="Helvetica Neue"/>
+                <a:latin typeface="Arial"/>
               </a:rPr>
               <a:t>class         vegetation | water | built_up | bare_soil | road | building_candidate</a:t>
             </a:r>
@@ -6219,9 +6341,9 @@
                 <a:solidFill>
                   <a:srgbClr val="101010"/>
                 </a:solidFill>
-                <a:latin typeface="Helvetica Neue"/>
-              </a:rPr>
-              <a:t>confidence    0..100, derived from per-pixel evidence</a:t>
+                <a:latin typeface="Arial"/>
+              </a:rPr>
+              <a:t>confidence    0..100, по покрытию пикселями</a:t>
             </a:r>
           </a:p>
           <a:p>
@@ -6235,9 +6357,9 @@
                 <a:solidFill>
                   <a:srgbClr val="101010"/>
                 </a:solidFill>
-                <a:latin typeface="Helvetica Neue"/>
-              </a:rPr>
-              <a:t>source        source scene id</a:t>
+                <a:latin typeface="Arial"/>
+              </a:rPr>
+              <a:t>source        id исходного снимка</a:t>
             </a:r>
           </a:p>
           <a:p>
@@ -6251,7 +6373,7 @@
                 <a:solidFill>
                   <a:srgbClr val="101010"/>
                 </a:solidFill>
-                <a:latin typeface="Helvetica Neue"/>
+                <a:latin typeface="Arial"/>
               </a:rPr>
               <a:t>geometry      Polygon | LineString | Point  (EPSG:4326)</a:t>
             </a:r>
@@ -6267,9 +6389,9 @@
                 <a:solidFill>
                   <a:srgbClr val="101010"/>
                 </a:solidFill>
-                <a:latin typeface="Helvetica Neue"/>
-              </a:rPr>
-              <a:t>area_m2       polygons only, computed in scene-local UTM</a:t>
+                <a:latin typeface="Arial"/>
+              </a:rPr>
+              <a:t>area_m2       только полигоны, в локальной UTM-зоне</a:t>
             </a:r>
           </a:p>
           <a:p>
@@ -6283,9 +6405,9 @@
                 <a:solidFill>
                   <a:srgbClr val="101010"/>
                 </a:solidFill>
-                <a:latin typeface="Helvetica Neue"/>
-              </a:rPr>
-              <a:t>length_m      lines only, computed in scene-local UTM</a:t>
+                <a:latin typeface="Arial"/>
+              </a:rPr>
+              <a:t>length_m      только линии, в локальной UTM-зоне</a:t>
             </a:r>
           </a:p>
         </p:txBody>
@@ -6341,6 +6463,7 @@
           <a:lstStyle/>
           <a:p>
             <a:pPr algn="ctr"/>
+            <a:endParaRPr/>
           </a:p>
         </p:txBody>
       </p:sp>
@@ -6361,7 +6484,7 @@
           <a:noFill/>
         </p:spPr>
         <p:txBody>
-          <a:bodyPr wrap="square" lIns="109728" rIns="109728" tIns="73152" bIns="73152" anchor="t">
+          <a:bodyPr wrap="square" lIns="109728" tIns="73152" rIns="109728" bIns="73152" anchor="t">
             <a:spAutoFit/>
           </a:bodyPr>
           <a:lstStyle/>
@@ -6372,9 +6495,9 @@
                 <a:solidFill>
                   <a:srgbClr val="101010"/>
                 </a:solidFill>
-                <a:latin typeface="Helvetica Neue"/>
-              </a:rPr>
-              <a:t>Files</a:t>
+                <a:latin typeface="Arial"/>
+              </a:rPr>
+              <a:t>Файлы</a:t>
             </a:r>
           </a:p>
         </p:txBody>
@@ -6396,7 +6519,7 @@
           <a:noFill/>
         </p:spPr>
         <p:txBody>
-          <a:bodyPr wrap="square" lIns="164592" rIns="164592" tIns="128016" bIns="128016" anchor="t">
+          <a:bodyPr wrap="square" lIns="164592" tIns="128016" rIns="164592" bIns="128016" anchor="t">
             <a:spAutoFit/>
           </a:bodyPr>
           <a:lstStyle/>
@@ -6411,9 +6534,9 @@
                 <a:solidFill>
                   <a:srgbClr val="101010"/>
                 </a:solidFill>
-                <a:latin typeface="Helvetica Neue"/>
-              </a:rPr>
-              <a:t>&lt;scene&gt;.geojson   RFC 7946, no crs member</a:t>
+                <a:latin typeface="Arial"/>
+              </a:rPr>
+              <a:t>&lt;scene&gt;.geojson   RFC 7946, без поля crs</a:t>
             </a:r>
           </a:p>
           <a:p>
@@ -6427,9 +6550,9 @@
                 <a:solidFill>
                   <a:srgbClr val="101010"/>
                 </a:solidFill>
-                <a:latin typeface="Helvetica Neue"/>
-              </a:rPr>
-              <a:t>&lt;scene&gt;.gpkg      3 layers by geom type</a:t>
+                <a:latin typeface="Arial"/>
+              </a:rPr>
+              <a:t>&lt;scene&gt;.gpkg      3 слоя по типу геометрии</a:t>
             </a:r>
           </a:p>
           <a:p>
@@ -6443,9 +6566,9 @@
                 <a:solidFill>
                   <a:srgbClr val="101010"/>
                 </a:solidFill>
-                <a:latin typeface="Helvetica Neue"/>
-              </a:rPr>
-              <a:t>summary.csv       per-scene per-class stats</a:t>
+                <a:latin typeface="Arial"/>
+              </a:rPr>
+              <a:t>summary.csv       статистика по сценам и классам</a:t>
             </a:r>
           </a:p>
         </p:txBody>
@@ -6501,6 +6624,7 @@
           <a:lstStyle/>
           <a:p>
             <a:pPr algn="ctr"/>
+            <a:endParaRPr/>
           </a:p>
         </p:txBody>
       </p:sp>
@@ -6521,7 +6645,7 @@
           <a:noFill/>
         </p:spPr>
         <p:txBody>
-          <a:bodyPr wrap="square" lIns="109728" rIns="109728" tIns="73152" bIns="73152" anchor="t">
+          <a:bodyPr wrap="square" lIns="109728" tIns="73152" rIns="109728" bIns="73152" anchor="t">
             <a:spAutoFit/>
           </a:bodyPr>
           <a:lstStyle/>
@@ -6532,9 +6656,9 @@
                 <a:solidFill>
                   <a:srgbClr val="101010"/>
                 </a:solidFill>
-                <a:latin typeface="Helvetica Neue"/>
-              </a:rPr>
-              <a:t>CRS handling</a:t>
+                <a:latin typeface="Arial"/>
+              </a:rPr>
+              <a:t>Системы координат</a:t>
             </a:r>
           </a:p>
         </p:txBody>
@@ -6556,7 +6680,7 @@
           <a:noFill/>
         </p:spPr>
         <p:txBody>
-          <a:bodyPr wrap="square" lIns="164592" rIns="164592" tIns="128016" bIns="128016" anchor="t">
+          <a:bodyPr wrap="square" lIns="164592" tIns="128016" rIns="164592" bIns="128016" anchor="t">
             <a:spAutoFit/>
           </a:bodyPr>
           <a:lstStyle/>
@@ -6571,7 +6695,7 @@
                 <a:solidFill>
                   <a:srgbClr val="101010"/>
                 </a:solidFill>
-                <a:latin typeface="Helvetica Neue"/>
+                <a:latin typeface="Arial"/>
               </a:rPr>
               <a:t>GeoJSON: EPSG:4326 (RFC 7946)</a:t>
             </a:r>
@@ -6587,9 +6711,9 @@
                 <a:solidFill>
                   <a:srgbClr val="101010"/>
                 </a:solidFill>
-                <a:latin typeface="Helvetica Neue"/>
-              </a:rPr>
-              <a:t>GeoPackage: same, declared in header</a:t>
+                <a:latin typeface="Arial"/>
+              </a:rPr>
+              <a:t>GeoPackage: то же, СК в заголовке</a:t>
             </a:r>
           </a:p>
           <a:p>
@@ -6603,9 +6727,9 @@
                 <a:solidFill>
                   <a:srgbClr val="101010"/>
                 </a:solidFill>
-                <a:latin typeface="Helvetica Neue"/>
-              </a:rPr>
-              <a:t>Areas / lengths: scene-local UTM zone auto-picked from longitude/latitude</a:t>
+                <a:latin typeface="Arial"/>
+              </a:rPr>
+              <a:t>Площади и длины — в локальной UTM-зоне, автоматически по координатам сцены</a:t>
             </a:r>
           </a:p>
         </p:txBody>
@@ -6619,7 +6743,7 @@
         <p:spPr>
           <a:xfrm>
             <a:off x="502920" y="6446520"/>
-            <a:ext cx="7315200" cy="274320"/>
+            <a:ext cx="7315200" cy="286232"/>
           </a:xfrm>
           <a:prstGeom prst="rect">
             <a:avLst/>
@@ -6627,20 +6751,46 @@
           <a:noFill/>
         </p:spPr>
         <p:txBody>
-          <a:bodyPr wrap="square" lIns="109728" rIns="109728" tIns="73152" bIns="73152" anchor="t">
+          <a:bodyPr wrap="square" lIns="109728" tIns="73152" rIns="109728" bIns="73152" anchor="t">
             <a:spAutoFit/>
           </a:bodyPr>
           <a:lstStyle/>
           <a:p>
-            <a:pPr algn="l"/>
-            <a:r>
-              <a:rPr sz="900" b="0">
+            <a:r>
+              <a:rPr lang="ru-RU" sz="900" dirty="0">
                 <a:solidFill>
                   <a:srgbClr val="808080"/>
                 </a:solidFill>
-                <a:latin typeface="Helvetica Neue"/>
-              </a:rPr>
-              <a:t>NURIS Prototype  -  HackNU '26</a:t>
+                <a:latin typeface="Arial"/>
+              </a:rPr>
+              <a:t>Прототип </a:t>
+            </a:r>
+            <a:r>
+              <a:rPr lang="en-US" sz="900" dirty="0">
+                <a:solidFill>
+                  <a:srgbClr val="808080"/>
+                </a:solidFill>
+                <a:latin typeface="Arial"/>
+              </a:rPr>
+              <a:t>NURIS  -  </a:t>
+            </a:r>
+            <a:r>
+              <a:rPr lang="en-US" sz="900" dirty="0" err="1">
+                <a:solidFill>
+                  <a:srgbClr val="808080"/>
+                </a:solidFill>
+                <a:latin typeface="Arial"/>
+              </a:rPr>
+              <a:t>DropOuts</a:t>
+            </a:r>
+            <a:r>
+              <a:rPr lang="en-US" sz="900" dirty="0">
+                <a:solidFill>
+                  <a:srgbClr val="808080"/>
+                </a:solidFill>
+                <a:latin typeface="Arial"/>
+              </a:rPr>
+              <a:t> '26</a:t>
             </a:r>
           </a:p>
         </p:txBody>
@@ -6654,7 +6804,7 @@
 </file>
 
 <file path=ppt/slides/slide5.xml><?xml version="1.0" encoding="utf-8"?>
-<p:sld xmlns:a="http://schemas.openxmlformats.org/drawingml/2006/main" xmlns:p="http://schemas.openxmlformats.org/presentationml/2006/main" xmlns:r="http://schemas.openxmlformats.org/officeDocument/2006/relationships">
+<p:sld xmlns:a="http://schemas.openxmlformats.org/drawingml/2006/main" xmlns:r="http://schemas.openxmlformats.org/officeDocument/2006/relationships" xmlns:p="http://schemas.openxmlformats.org/presentationml/2006/main">
   <p:cSld>
     <p:spTree>
       <p:nvGrpSpPr>
@@ -6662,7 +6812,14 @@
         <p:cNvGrpSpPr/>
         <p:nvPr/>
       </p:nvGrpSpPr>
-      <p:grpSpPr/>
+      <p:grpSpPr>
+        <a:xfrm>
+          <a:off x="0" y="0"/>
+          <a:ext cx="0" cy="0"/>
+          <a:chOff x="0" y="0"/>
+          <a:chExt cx="0" cy="0"/>
+        </a:xfrm>
+      </p:grpSpPr>
       <p:sp>
         <p:nvSpPr>
           <p:cNvPr id="2" name="Rectangle 1"/>
@@ -6704,6 +6861,7 @@
           <a:lstStyle/>
           <a:p>
             <a:pPr algn="ctr"/>
+            <a:endParaRPr/>
           </a:p>
         </p:txBody>
       </p:sp>
@@ -6716,7 +6874,7 @@
         <p:spPr>
           <a:xfrm>
             <a:off x="502920" y="411480"/>
-            <a:ext cx="7315200" cy="502920"/>
+            <a:ext cx="9144000" cy="502920"/>
           </a:xfrm>
           <a:prstGeom prst="rect">
             <a:avLst/>
@@ -6724,7 +6882,7 @@
           <a:noFill/>
         </p:spPr>
         <p:txBody>
-          <a:bodyPr wrap="square" lIns="109728" rIns="109728" tIns="73152" bIns="73152" anchor="ctr">
+          <a:bodyPr wrap="square" lIns="109728" tIns="73152" rIns="109728" bIns="73152" anchor="ctr">
             <a:spAutoFit/>
           </a:bodyPr>
           <a:lstStyle/>
@@ -6735,9 +6893,9 @@
                 <a:solidFill>
                   <a:srgbClr val="101010"/>
                 </a:solidFill>
-                <a:latin typeface="Helvetica Neue"/>
-              </a:rPr>
-              <a:t>DEMO  -  ALMATY_10</a:t>
+                <a:latin typeface="Arial"/>
+              </a:rPr>
+              <a:t>ДЕМО  -  АСТАНА_7</a:t>
             </a:r>
           </a:p>
         </p:txBody>
@@ -6782,6 +6940,7 @@
           <a:lstStyle/>
           <a:p>
             <a:pPr algn="ctr"/>
+            <a:endParaRPr/>
           </a:p>
         </p:txBody>
       </p:sp>
@@ -6823,7 +6982,7 @@
           </a:fontRef>
         </p:style>
         <p:txBody>
-          <a:bodyPr rtlCol="0" anchor="ctr" wrap="square" lIns="109728" rIns="109728" tIns="73152" bIns="73152"/>
+          <a:bodyPr wrap="square" lIns="109728" tIns="73152" rIns="109728" bIns="73152" rtlCol="0" anchor="ctr"/>
           <a:lstStyle/>
           <a:p>
             <a:pPr algn="ctr"/>
@@ -6832,9 +6991,9 @@
                 <a:solidFill>
                   <a:srgbClr val="C8F23E"/>
                 </a:solidFill>
-                <a:latin typeface="Helvetica Neue"/>
-              </a:rPr>
-              <a:t>05 / 09</a:t>
+                <a:latin typeface="Arial"/>
+              </a:rPr>
+              <a:t>06 / 09</a:t>
             </a:r>
           </a:p>
         </p:txBody>
@@ -6890,12 +7049,13 @@
           <a:lstStyle/>
           <a:p>
             <a:pPr algn="ctr"/>
+            <a:endParaRPr/>
           </a:p>
         </p:txBody>
       </p:sp>
       <p:pic>
         <p:nvPicPr>
-          <p:cNvPr id="7" name="Picture 6" descr="Almaty_10_overlay.png"/>
+          <p:cNvPr id="7" name="Picture 6" descr="Astana_7_overlay.png"/>
           <p:cNvPicPr>
             <a:picLocks noChangeAspect="1"/>
           </p:cNvPicPr>
@@ -6968,6 +7128,7 @@
           <a:lstStyle/>
           <a:p>
             <a:pPr algn="ctr"/>
+            <a:endParaRPr/>
           </a:p>
         </p:txBody>
       </p:sp>
@@ -6988,7 +7149,7 @@
           <a:noFill/>
         </p:spPr>
         <p:txBody>
-          <a:bodyPr wrap="square" lIns="109728" rIns="109728" tIns="73152" bIns="73152" anchor="t">
+          <a:bodyPr wrap="square" lIns="109728" tIns="73152" rIns="109728" bIns="73152" anchor="t">
             <a:spAutoFit/>
           </a:bodyPr>
           <a:lstStyle/>
@@ -6999,9 +7160,9 @@
                 <a:solidFill>
                   <a:srgbClr val="101010"/>
                 </a:solidFill>
-                <a:latin typeface="Helvetica Neue"/>
-              </a:rPr>
-              <a:t>922 features</a:t>
+                <a:latin typeface="Arial"/>
+              </a:rPr>
+              <a:t>1 010 объектов</a:t>
             </a:r>
           </a:p>
         </p:txBody>
@@ -7023,7 +7184,7 @@
           <a:noFill/>
         </p:spPr>
         <p:txBody>
-          <a:bodyPr wrap="square" lIns="164592" rIns="164592" tIns="128016" bIns="128016" anchor="t">
+          <a:bodyPr wrap="square" lIns="164592" tIns="128016" rIns="164592" bIns="128016" anchor="t">
             <a:spAutoFit/>
           </a:bodyPr>
           <a:lstStyle/>
@@ -7038,9 +7199,9 @@
                 <a:solidFill>
                   <a:srgbClr val="101010"/>
                 </a:solidFill>
-                <a:latin typeface="Helvetica Neue"/>
-              </a:rPr>
-              <a:t>AOI 0.143 km^2</a:t>
+                <a:latin typeface="Arial"/>
+              </a:rPr>
+              <a:t>AOI 0,305 км^2</a:t>
             </a:r>
           </a:p>
           <a:p>
@@ -7054,9 +7215,9 @@
                 <a:solidFill>
                   <a:srgbClr val="101010"/>
                 </a:solidFill>
-                <a:latin typeface="Helvetica Neue"/>
-              </a:rPr>
-              <a:t>6 thematic classes co-extracted</a:t>
+                <a:latin typeface="Arial"/>
+              </a:rPr>
+              <a:t>Площадь больше, чем в Алматы_10</a:t>
             </a:r>
           </a:p>
           <a:p>
@@ -7070,9 +7231,9 @@
                 <a:solidFill>
                   <a:srgbClr val="101010"/>
                 </a:solidFill>
-                <a:latin typeface="Helvetica Neue"/>
-              </a:rPr>
-              <a:t>Source: Almaty_10.tif (RGB)</a:t>
+                <a:latin typeface="Arial"/>
+              </a:rPr>
+              <a:t>Источник: Astana_7.tif (RGB)</a:t>
             </a:r>
           </a:p>
         </p:txBody>
@@ -7128,6 +7289,7 @@
           <a:lstStyle/>
           <a:p>
             <a:pPr algn="ctr"/>
+            <a:endParaRPr/>
           </a:p>
         </p:txBody>
       </p:sp>
@@ -7148,7 +7310,7 @@
           <a:noFill/>
         </p:spPr>
         <p:txBody>
-          <a:bodyPr wrap="square" lIns="109728" rIns="109728" tIns="73152" bIns="73152" anchor="t">
+          <a:bodyPr wrap="square" lIns="109728" tIns="73152" rIns="109728" bIns="73152" anchor="t">
             <a:spAutoFit/>
           </a:bodyPr>
           <a:lstStyle/>
@@ -7159,9 +7321,9 @@
                 <a:solidFill>
                   <a:srgbClr val="101010"/>
                 </a:solidFill>
-                <a:latin typeface="Helvetica Neue"/>
-              </a:rPr>
-              <a:t>Per-class counts</a:t>
+                <a:latin typeface="Arial"/>
+              </a:rPr>
+              <a:t>Кол-во по классам</a:t>
             </a:r>
           </a:p>
         </p:txBody>
@@ -7183,7 +7345,7 @@
           <a:noFill/>
         </p:spPr>
         <p:txBody>
-          <a:bodyPr wrap="square" lIns="164592" rIns="164592" tIns="128016" bIns="128016" anchor="t">
+          <a:bodyPr wrap="square" lIns="164592" tIns="128016" rIns="164592" bIns="128016" anchor="t">
             <a:spAutoFit/>
           </a:bodyPr>
           <a:lstStyle/>
@@ -7198,9 +7360,9 @@
                 <a:solidFill>
                   <a:srgbClr val="101010"/>
                 </a:solidFill>
-                <a:latin typeface="Helvetica Neue"/>
-              </a:rPr>
-              <a:t>vegetation         217</a:t>
+                <a:latin typeface="Arial"/>
+              </a:rPr>
+              <a:t>растительность     234    /  54 643 м^2</a:t>
             </a:r>
           </a:p>
           <a:p>
@@ -7214,9 +7376,9 @@
                 <a:solidFill>
                   <a:srgbClr val="101010"/>
                 </a:solidFill>
-                <a:latin typeface="Helvetica Neue"/>
-              </a:rPr>
-              <a:t>bare_soil          209</a:t>
+                <a:latin typeface="Arial"/>
+              </a:rPr>
+              <a:t>дорога             224    /   4 101 м</a:t>
             </a:r>
           </a:p>
           <a:p>
@@ -7230,9 +7392,9 @@
                 <a:solidFill>
                   <a:srgbClr val="101010"/>
                 </a:solidFill>
-                <a:latin typeface="Helvetica Neue"/>
-              </a:rPr>
-              <a:t>road               187    /  2,986 m</a:t>
+                <a:latin typeface="Arial"/>
+              </a:rPr>
+              <a:t>голая земля        199    /  40 167 м^2</a:t>
             </a:r>
           </a:p>
           <a:p>
@@ -7246,9 +7408,9 @@
                 <a:solidFill>
                   <a:srgbClr val="101010"/>
                 </a:solidFill>
-                <a:latin typeface="Helvetica Neue"/>
-              </a:rPr>
-              <a:t>built_up           141    /  4,821 m^2</a:t>
+                <a:latin typeface="Arial"/>
+              </a:rPr>
+              <a:t>застройка          193    /   7 743 м^2</a:t>
             </a:r>
           </a:p>
           <a:p>
@@ -7262,9 +7424,9 @@
                 <a:solidFill>
                   <a:srgbClr val="101010"/>
                 </a:solidFill>
-                <a:latin typeface="Helvetica Neue"/>
-              </a:rPr>
-              <a:t>building_cand.     112</a:t>
+                <a:latin typeface="Arial"/>
+              </a:rPr>
+              <a:t>здание-кандидат    135</a:t>
             </a:r>
           </a:p>
           <a:p>
@@ -7278,9 +7440,9 @@
                 <a:solidFill>
                   <a:srgbClr val="101010"/>
                 </a:solidFill>
-                <a:latin typeface="Helvetica Neue"/>
-              </a:rPr>
-              <a:t>water               56    /  3,708 m^2</a:t>
+                <a:latin typeface="Arial"/>
+              </a:rPr>
+              <a:t>вода                25    /   2 178 м^2</a:t>
             </a:r>
           </a:p>
         </p:txBody>
@@ -7294,7 +7456,7 @@
         <p:spPr>
           <a:xfrm>
             <a:off x="502920" y="6446520"/>
-            <a:ext cx="7315200" cy="274320"/>
+            <a:ext cx="7315200" cy="286232"/>
           </a:xfrm>
           <a:prstGeom prst="rect">
             <a:avLst/>
@@ -7302,20 +7464,46 @@
           <a:noFill/>
         </p:spPr>
         <p:txBody>
-          <a:bodyPr wrap="square" lIns="109728" rIns="109728" tIns="73152" bIns="73152" anchor="t">
+          <a:bodyPr wrap="square" lIns="109728" tIns="73152" rIns="109728" bIns="73152" anchor="t">
             <a:spAutoFit/>
           </a:bodyPr>
           <a:lstStyle/>
           <a:p>
-            <a:pPr algn="l"/>
-            <a:r>
-              <a:rPr sz="900" b="0">
+            <a:r>
+              <a:rPr lang="ru-RU" sz="900" dirty="0">
                 <a:solidFill>
                   <a:srgbClr val="808080"/>
                 </a:solidFill>
-                <a:latin typeface="Helvetica Neue"/>
-              </a:rPr>
-              <a:t>NURIS Prototype  -  HackNU '26</a:t>
+                <a:latin typeface="Arial"/>
+              </a:rPr>
+              <a:t>Прототип </a:t>
+            </a:r>
+            <a:r>
+              <a:rPr lang="en-US" sz="900" dirty="0">
+                <a:solidFill>
+                  <a:srgbClr val="808080"/>
+                </a:solidFill>
+                <a:latin typeface="Arial"/>
+              </a:rPr>
+              <a:t>NURIS  -  </a:t>
+            </a:r>
+            <a:r>
+              <a:rPr lang="en-US" sz="900" dirty="0" err="1">
+                <a:solidFill>
+                  <a:srgbClr val="808080"/>
+                </a:solidFill>
+                <a:latin typeface="Arial"/>
+              </a:rPr>
+              <a:t>DropOuts</a:t>
+            </a:r>
+            <a:r>
+              <a:rPr lang="en-US" sz="900" dirty="0">
+                <a:solidFill>
+                  <a:srgbClr val="808080"/>
+                </a:solidFill>
+                <a:latin typeface="Arial"/>
+              </a:rPr>
+              <a:t> '26</a:t>
             </a:r>
           </a:p>
         </p:txBody>
@@ -7329,7 +7517,7 @@
 </file>
 
 <file path=ppt/slides/slide6.xml><?xml version="1.0" encoding="utf-8"?>
-<p:sld xmlns:a="http://schemas.openxmlformats.org/drawingml/2006/main" xmlns:p="http://schemas.openxmlformats.org/presentationml/2006/main" xmlns:r="http://schemas.openxmlformats.org/officeDocument/2006/relationships">
+<p:sld xmlns:a="http://schemas.openxmlformats.org/drawingml/2006/main" xmlns:r="http://schemas.openxmlformats.org/officeDocument/2006/relationships" xmlns:p="http://schemas.openxmlformats.org/presentationml/2006/main">
   <p:cSld>
     <p:spTree>
       <p:nvGrpSpPr>
@@ -7337,7 +7525,14 @@
         <p:cNvGrpSpPr/>
         <p:nvPr/>
       </p:nvGrpSpPr>
-      <p:grpSpPr/>
+      <p:grpSpPr>
+        <a:xfrm>
+          <a:off x="0" y="0"/>
+          <a:ext cx="0" cy="0"/>
+          <a:chOff x="0" y="0"/>
+          <a:chExt cx="0" cy="0"/>
+        </a:xfrm>
+      </p:grpSpPr>
       <p:sp>
         <p:nvSpPr>
           <p:cNvPr id="2" name="Rectangle 1"/>
@@ -7379,6 +7574,7 @@
           <a:lstStyle/>
           <a:p>
             <a:pPr algn="ctr"/>
+            <a:endParaRPr/>
           </a:p>
         </p:txBody>
       </p:sp>
@@ -7391,7 +7587,7 @@
         <p:spPr>
           <a:xfrm>
             <a:off x="502920" y="411480"/>
-            <a:ext cx="7315200" cy="502920"/>
+            <a:ext cx="9144000" cy="502920"/>
           </a:xfrm>
           <a:prstGeom prst="rect">
             <a:avLst/>
@@ -7399,7 +7595,7 @@
           <a:noFill/>
         </p:spPr>
         <p:txBody>
-          <a:bodyPr wrap="square" lIns="109728" rIns="109728" tIns="73152" bIns="73152" anchor="ctr">
+          <a:bodyPr wrap="square" lIns="109728" tIns="73152" rIns="109728" bIns="73152" anchor="ctr">
             <a:spAutoFit/>
           </a:bodyPr>
           <a:lstStyle/>
@@ -7410,9 +7606,9 @@
                 <a:solidFill>
                   <a:srgbClr val="101010"/>
                 </a:solidFill>
-                <a:latin typeface="Helvetica Neue"/>
-              </a:rPr>
-              <a:t>DEMO  -  ASTANA_7</a:t>
+                <a:latin typeface="Arial"/>
+              </a:rPr>
+              <a:t>ДЕМО  -  АЛМАТЫ_10</a:t>
             </a:r>
           </a:p>
         </p:txBody>
@@ -7457,6 +7653,7 @@
           <a:lstStyle/>
           <a:p>
             <a:pPr algn="ctr"/>
+            <a:endParaRPr/>
           </a:p>
         </p:txBody>
       </p:sp>
@@ -7498,7 +7695,7 @@
           </a:fontRef>
         </p:style>
         <p:txBody>
-          <a:bodyPr rtlCol="0" anchor="ctr" wrap="square" lIns="109728" rIns="109728" tIns="73152" bIns="73152"/>
+          <a:bodyPr wrap="square" lIns="109728" tIns="73152" rIns="109728" bIns="73152" rtlCol="0" anchor="ctr"/>
           <a:lstStyle/>
           <a:p>
             <a:pPr algn="ctr"/>
@@ -7507,9 +7704,9 @@
                 <a:solidFill>
                   <a:srgbClr val="C8F23E"/>
                 </a:solidFill>
-                <a:latin typeface="Helvetica Neue"/>
-              </a:rPr>
-              <a:t>06 / 09</a:t>
+                <a:latin typeface="Arial"/>
+              </a:rPr>
+              <a:t>05 / 09</a:t>
             </a:r>
           </a:p>
         </p:txBody>
@@ -7565,12 +7762,13 @@
           <a:lstStyle/>
           <a:p>
             <a:pPr algn="ctr"/>
+            <a:endParaRPr/>
           </a:p>
         </p:txBody>
       </p:sp>
       <p:pic>
         <p:nvPicPr>
-          <p:cNvPr id="7" name="Picture 6" descr="Astana_7_overlay.png"/>
+          <p:cNvPr id="7" name="Picture 6" descr="Almaty_10_overlay.png"/>
           <p:cNvPicPr>
             <a:picLocks noChangeAspect="1"/>
           </p:cNvPicPr>
@@ -7643,6 +7841,7 @@
           <a:lstStyle/>
           <a:p>
             <a:pPr algn="ctr"/>
+            <a:endParaRPr/>
           </a:p>
         </p:txBody>
       </p:sp>
@@ -7663,7 +7862,7 @@
           <a:noFill/>
         </p:spPr>
         <p:txBody>
-          <a:bodyPr wrap="square" lIns="109728" rIns="109728" tIns="73152" bIns="73152" anchor="t">
+          <a:bodyPr wrap="square" lIns="109728" tIns="73152" rIns="109728" bIns="73152" anchor="t">
             <a:spAutoFit/>
           </a:bodyPr>
           <a:lstStyle/>
@@ -7674,9 +7873,9 @@
                 <a:solidFill>
                   <a:srgbClr val="101010"/>
                 </a:solidFill>
-                <a:latin typeface="Helvetica Neue"/>
-              </a:rPr>
-              <a:t>1,010 features</a:t>
+                <a:latin typeface="Arial"/>
+              </a:rPr>
+              <a:t>922 объекта</a:t>
             </a:r>
           </a:p>
         </p:txBody>
@@ -7698,7 +7897,7 @@
           <a:noFill/>
         </p:spPr>
         <p:txBody>
-          <a:bodyPr wrap="square" lIns="164592" rIns="164592" tIns="128016" bIns="128016" anchor="t">
+          <a:bodyPr wrap="square" lIns="164592" tIns="128016" rIns="164592" bIns="128016" anchor="t">
             <a:spAutoFit/>
           </a:bodyPr>
           <a:lstStyle/>
@@ -7713,9 +7912,9 @@
                 <a:solidFill>
                   <a:srgbClr val="101010"/>
                 </a:solidFill>
-                <a:latin typeface="Helvetica Neue"/>
-              </a:rPr>
-              <a:t>AOI 0.305 km^2</a:t>
+                <a:latin typeface="Arial"/>
+              </a:rPr>
+              <a:t>AOI 0,143 км^2</a:t>
             </a:r>
           </a:p>
           <a:p>
@@ -7729,9 +7928,9 @@
                 <a:solidFill>
                   <a:srgbClr val="101010"/>
                 </a:solidFill>
-                <a:latin typeface="Helvetica Neue"/>
-              </a:rPr>
-              <a:t>Larger AOI than Almaty_10</a:t>
+                <a:latin typeface="Arial"/>
+              </a:rPr>
+              <a:t>6 классов извлечены вместе</a:t>
             </a:r>
           </a:p>
           <a:p>
@@ -7745,9 +7944,9 @@
                 <a:solidFill>
                   <a:srgbClr val="101010"/>
                 </a:solidFill>
-                <a:latin typeface="Helvetica Neue"/>
-              </a:rPr>
-              <a:t>Source: Astana_7.tif (RGB)</a:t>
+                <a:latin typeface="Arial"/>
+              </a:rPr>
+              <a:t>Источник: Almaty_10.tif (RGB)</a:t>
             </a:r>
           </a:p>
         </p:txBody>
@@ -7803,6 +8002,7 @@
           <a:lstStyle/>
           <a:p>
             <a:pPr algn="ctr"/>
+            <a:endParaRPr/>
           </a:p>
         </p:txBody>
       </p:sp>
@@ -7823,7 +8023,7 @@
           <a:noFill/>
         </p:spPr>
         <p:txBody>
-          <a:bodyPr wrap="square" lIns="109728" rIns="109728" tIns="73152" bIns="73152" anchor="t">
+          <a:bodyPr wrap="square" lIns="109728" tIns="73152" rIns="109728" bIns="73152" anchor="t">
             <a:spAutoFit/>
           </a:bodyPr>
           <a:lstStyle/>
@@ -7834,9 +8034,9 @@
                 <a:solidFill>
                   <a:srgbClr val="101010"/>
                 </a:solidFill>
-                <a:latin typeface="Helvetica Neue"/>
-              </a:rPr>
-              <a:t>Per-class counts</a:t>
+                <a:latin typeface="Arial"/>
+              </a:rPr>
+              <a:t>Кол-во по классам</a:t>
             </a:r>
           </a:p>
         </p:txBody>
@@ -7858,7 +8058,7 @@
           <a:noFill/>
         </p:spPr>
         <p:txBody>
-          <a:bodyPr wrap="square" lIns="164592" rIns="164592" tIns="128016" bIns="128016" anchor="t">
+          <a:bodyPr wrap="square" lIns="164592" tIns="128016" rIns="164592" bIns="128016" anchor="t">
             <a:spAutoFit/>
           </a:bodyPr>
           <a:lstStyle/>
@@ -7873,9 +8073,9 @@
                 <a:solidFill>
                   <a:srgbClr val="101010"/>
                 </a:solidFill>
-                <a:latin typeface="Helvetica Neue"/>
-              </a:rPr>
-              <a:t>vegetation         234    /  54,643 m^2</a:t>
+                <a:latin typeface="Arial"/>
+              </a:rPr>
+              <a:t>растительность     217</a:t>
             </a:r>
           </a:p>
           <a:p>
@@ -7889,9 +8089,9 @@
                 <a:solidFill>
                   <a:srgbClr val="101010"/>
                 </a:solidFill>
-                <a:latin typeface="Helvetica Neue"/>
-              </a:rPr>
-              <a:t>road               224    /   4,101 m</a:t>
+                <a:latin typeface="Arial"/>
+              </a:rPr>
+              <a:t>голая земля        209</a:t>
             </a:r>
           </a:p>
           <a:p>
@@ -7905,9 +8105,9 @@
                 <a:solidFill>
                   <a:srgbClr val="101010"/>
                 </a:solidFill>
-                <a:latin typeface="Helvetica Neue"/>
-              </a:rPr>
-              <a:t>bare_soil          199    /  40,167 m^2</a:t>
+                <a:latin typeface="Arial"/>
+              </a:rPr>
+              <a:t>дорога             187    /  2 986 м</a:t>
             </a:r>
           </a:p>
           <a:p>
@@ -7921,9 +8121,9 @@
                 <a:solidFill>
                   <a:srgbClr val="101010"/>
                 </a:solidFill>
-                <a:latin typeface="Helvetica Neue"/>
-              </a:rPr>
-              <a:t>built_up           193    /   7,743 m^2</a:t>
+                <a:latin typeface="Arial"/>
+              </a:rPr>
+              <a:t>застройка          141    /  4 821 м^2</a:t>
             </a:r>
           </a:p>
           <a:p>
@@ -7937,9 +8137,9 @@
                 <a:solidFill>
                   <a:srgbClr val="101010"/>
                 </a:solidFill>
-                <a:latin typeface="Helvetica Neue"/>
-              </a:rPr>
-              <a:t>building_cand.     135</a:t>
+                <a:latin typeface="Arial"/>
+              </a:rPr>
+              <a:t>здание-кандидат    112</a:t>
             </a:r>
           </a:p>
           <a:p>
@@ -7953,9 +8153,9 @@
                 <a:solidFill>
                   <a:srgbClr val="101010"/>
                 </a:solidFill>
-                <a:latin typeface="Helvetica Neue"/>
-              </a:rPr>
-              <a:t>water               25    /   2,178 m^2</a:t>
+                <a:latin typeface="Arial"/>
+              </a:rPr>
+              <a:t>вода                56    /  3 708 м^2</a:t>
             </a:r>
           </a:p>
         </p:txBody>
@@ -7969,7 +8169,7 @@
         <p:spPr>
           <a:xfrm>
             <a:off x="502920" y="6446520"/>
-            <a:ext cx="7315200" cy="274320"/>
+            <a:ext cx="7315200" cy="286232"/>
           </a:xfrm>
           <a:prstGeom prst="rect">
             <a:avLst/>
@@ -7977,20 +8177,46 @@
           <a:noFill/>
         </p:spPr>
         <p:txBody>
-          <a:bodyPr wrap="square" lIns="109728" rIns="109728" tIns="73152" bIns="73152" anchor="t">
+          <a:bodyPr wrap="square" lIns="109728" tIns="73152" rIns="109728" bIns="73152" anchor="t">
             <a:spAutoFit/>
           </a:bodyPr>
           <a:lstStyle/>
           <a:p>
-            <a:pPr algn="l"/>
-            <a:r>
-              <a:rPr sz="900" b="0">
+            <a:r>
+              <a:rPr lang="ru-RU" sz="900" dirty="0">
                 <a:solidFill>
                   <a:srgbClr val="808080"/>
                 </a:solidFill>
-                <a:latin typeface="Helvetica Neue"/>
-              </a:rPr>
-              <a:t>NURIS Prototype  -  HackNU '26</a:t>
+                <a:latin typeface="Arial"/>
+              </a:rPr>
+              <a:t>Прототип </a:t>
+            </a:r>
+            <a:r>
+              <a:rPr lang="en-US" sz="900" dirty="0">
+                <a:solidFill>
+                  <a:srgbClr val="808080"/>
+                </a:solidFill>
+                <a:latin typeface="Arial"/>
+              </a:rPr>
+              <a:t>NURIS  -  </a:t>
+            </a:r>
+            <a:r>
+              <a:rPr lang="en-US" sz="900" dirty="0" err="1">
+                <a:solidFill>
+                  <a:srgbClr val="808080"/>
+                </a:solidFill>
+                <a:latin typeface="Arial"/>
+              </a:rPr>
+              <a:t>DropOuts</a:t>
+            </a:r>
+            <a:r>
+              <a:rPr lang="en-US" sz="900" dirty="0">
+                <a:solidFill>
+                  <a:srgbClr val="808080"/>
+                </a:solidFill>
+                <a:latin typeface="Arial"/>
+              </a:rPr>
+              <a:t> '26</a:t>
             </a:r>
           </a:p>
         </p:txBody>
@@ -8004,7 +8230,7 @@
 </file>
 
 <file path=ppt/slides/slide7.xml><?xml version="1.0" encoding="utf-8"?>
-<p:sld xmlns:a="http://schemas.openxmlformats.org/drawingml/2006/main" xmlns:p="http://schemas.openxmlformats.org/presentationml/2006/main" xmlns:r="http://schemas.openxmlformats.org/officeDocument/2006/relationships">
+<p:sld xmlns:a="http://schemas.openxmlformats.org/drawingml/2006/main" xmlns:r="http://schemas.openxmlformats.org/officeDocument/2006/relationships" xmlns:p="http://schemas.openxmlformats.org/presentationml/2006/main">
   <p:cSld>
     <p:spTree>
       <p:nvGrpSpPr>
@@ -8012,7 +8238,14 @@
         <p:cNvGrpSpPr/>
         <p:nvPr/>
       </p:nvGrpSpPr>
-      <p:grpSpPr/>
+      <p:grpSpPr>
+        <a:xfrm>
+          <a:off x="0" y="0"/>
+          <a:ext cx="0" cy="0"/>
+          <a:chOff x="0" y="0"/>
+          <a:chExt cx="0" cy="0"/>
+        </a:xfrm>
+      </p:grpSpPr>
       <p:sp>
         <p:nvSpPr>
           <p:cNvPr id="2" name="Rectangle 1"/>
@@ -8054,6 +8287,7 @@
           <a:lstStyle/>
           <a:p>
             <a:pPr algn="ctr"/>
+            <a:endParaRPr/>
           </a:p>
         </p:txBody>
       </p:sp>
@@ -8066,7 +8300,7 @@
         <p:spPr>
           <a:xfrm>
             <a:off x="502920" y="411480"/>
-            <a:ext cx="7315200" cy="502920"/>
+            <a:ext cx="9144000" cy="502920"/>
           </a:xfrm>
           <a:prstGeom prst="rect">
             <a:avLst/>
@@ -8074,7 +8308,7 @@
           <a:noFill/>
         </p:spPr>
         <p:txBody>
-          <a:bodyPr wrap="square" lIns="109728" rIns="109728" tIns="73152" bIns="73152" anchor="ctr">
+          <a:bodyPr wrap="square" lIns="109728" tIns="73152" rIns="109728" bIns="73152" anchor="ctr">
             <a:spAutoFit/>
           </a:bodyPr>
           <a:lstStyle/>
@@ -8085,9 +8319,9 @@
                 <a:solidFill>
                   <a:srgbClr val="101010"/>
                 </a:solidFill>
-                <a:latin typeface="Helvetica Neue"/>
-              </a:rPr>
-              <a:t>AGGREGATE METRICS ACROSS BOTH DEMOS</a:t>
+                <a:latin typeface="Arial"/>
+              </a:rPr>
+              <a:t>СВОДНЫЕ МЕТРИКИ ПО ДВУМ ДЕМО</a:t>
             </a:r>
           </a:p>
         </p:txBody>
@@ -8132,6 +8366,7 @@
           <a:lstStyle/>
           <a:p>
             <a:pPr algn="ctr"/>
+            <a:endParaRPr/>
           </a:p>
         </p:txBody>
       </p:sp>
@@ -8173,7 +8408,7 @@
           </a:fontRef>
         </p:style>
         <p:txBody>
-          <a:bodyPr rtlCol="0" anchor="ctr" wrap="square" lIns="109728" rIns="109728" tIns="73152" bIns="73152"/>
+          <a:bodyPr wrap="square" lIns="109728" tIns="73152" rIns="109728" bIns="73152" rtlCol="0" anchor="ctr"/>
           <a:lstStyle/>
           <a:p>
             <a:pPr algn="ctr"/>
@@ -8182,7 +8417,7 @@
                 <a:solidFill>
                   <a:srgbClr val="C8F23E"/>
                 </a:solidFill>
-                <a:latin typeface="Helvetica Neue"/>
+                <a:latin typeface="Arial"/>
               </a:rPr>
               <a:t>07 / 09</a:t>
             </a:r>
@@ -8240,6 +8475,7 @@
           <a:lstStyle/>
           <a:p>
             <a:pPr algn="ctr"/>
+            <a:endParaRPr/>
           </a:p>
         </p:txBody>
       </p:sp>
@@ -8251,8 +8487,8 @@
         </p:nvSpPr>
         <p:spPr>
           <a:xfrm>
-            <a:off x="594360" y="1536192"/>
-            <a:ext cx="2442133" cy="777240"/>
+            <a:off x="594360" y="1620113"/>
+            <a:ext cx="2442133" cy="609398"/>
           </a:xfrm>
           <a:prstGeom prst="rect">
             <a:avLst/>
@@ -8260,20 +8496,20 @@
           <a:noFill/>
         </p:spPr>
         <p:txBody>
-          <a:bodyPr wrap="square" lIns="109728" rIns="109728" tIns="73152" bIns="73152" anchor="ctr">
+          <a:bodyPr wrap="square" lIns="109728" tIns="73152" rIns="109728" bIns="73152" anchor="ctr">
             <a:spAutoFit/>
           </a:bodyPr>
           <a:lstStyle/>
           <a:p>
             <a:pPr algn="l"/>
             <a:r>
-              <a:rPr sz="3000" b="1">
-                <a:solidFill>
-                  <a:srgbClr val="101010"/>
-                </a:solidFill>
-                <a:latin typeface="Helvetica Neue"/>
-              </a:rPr>
-              <a:t>1,932</a:t>
+              <a:rPr sz="3000" b="1" dirty="0">
+                <a:solidFill>
+                  <a:srgbClr val="101010"/>
+                </a:solidFill>
+                <a:latin typeface="Arial"/>
+              </a:rPr>
+              <a:t>1932</a:t>
             </a:r>
           </a:p>
         </p:txBody>
@@ -8295,7 +8531,7 @@
           <a:noFill/>
         </p:spPr>
         <p:txBody>
-          <a:bodyPr wrap="square" lIns="109728" rIns="109728" tIns="73152" bIns="73152" anchor="t">
+          <a:bodyPr wrap="square" lIns="109728" tIns="73152" rIns="109728" bIns="73152" anchor="t">
             <a:spAutoFit/>
           </a:bodyPr>
           <a:lstStyle/>
@@ -8306,9 +8542,9 @@
                 <a:solidFill>
                   <a:srgbClr val="101010"/>
                 </a:solidFill>
-                <a:latin typeface="Helvetica Neue"/>
-              </a:rPr>
-              <a:t>features extracted</a:t>
+                <a:latin typeface="Arial"/>
+              </a:rPr>
+              <a:t>извлечённых объекта</a:t>
             </a:r>
           </a:p>
         </p:txBody>
@@ -8364,6 +8600,7 @@
           <a:lstStyle/>
           <a:p>
             <a:pPr algn="ctr"/>
+            <a:endParaRPr/>
           </a:p>
         </p:txBody>
       </p:sp>
@@ -8384,7 +8621,7 @@
           <a:noFill/>
         </p:spPr>
         <p:txBody>
-          <a:bodyPr wrap="square" lIns="109728" rIns="109728" tIns="73152" bIns="73152" anchor="ctr">
+          <a:bodyPr wrap="square" lIns="109728" tIns="73152" rIns="109728" bIns="73152" anchor="ctr">
             <a:spAutoFit/>
           </a:bodyPr>
           <a:lstStyle/>
@@ -8395,7 +8632,7 @@
                 <a:solidFill>
                   <a:srgbClr val="101010"/>
                 </a:solidFill>
-                <a:latin typeface="Helvetica Neue"/>
+                <a:latin typeface="Arial"/>
               </a:rPr>
               <a:t>6</a:t>
             </a:r>
@@ -8419,7 +8656,7 @@
           <a:noFill/>
         </p:spPr>
         <p:txBody>
-          <a:bodyPr wrap="square" lIns="109728" rIns="109728" tIns="73152" bIns="73152" anchor="t">
+          <a:bodyPr wrap="square" lIns="109728" tIns="73152" rIns="109728" bIns="73152" anchor="t">
             <a:spAutoFit/>
           </a:bodyPr>
           <a:lstStyle/>
@@ -8430,9 +8667,9 @@
                 <a:solidFill>
                   <a:srgbClr val="101010"/>
                 </a:solidFill>
-                <a:latin typeface="Helvetica Neue"/>
-              </a:rPr>
-              <a:t>thematic classes</a:t>
+                <a:latin typeface="Arial"/>
+              </a:rPr>
+              <a:t>тематических классов</a:t>
             </a:r>
           </a:p>
         </p:txBody>
@@ -8488,6 +8725,7 @@
           <a:lstStyle/>
           <a:p>
             <a:pPr algn="ctr"/>
+            <a:endParaRPr/>
           </a:p>
         </p:txBody>
       </p:sp>
@@ -8508,7 +8746,7 @@
           <a:noFill/>
         </p:spPr>
         <p:txBody>
-          <a:bodyPr wrap="square" lIns="109728" rIns="109728" tIns="73152" bIns="73152" anchor="ctr">
+          <a:bodyPr wrap="square" lIns="109728" tIns="73152" rIns="109728" bIns="73152" anchor="ctr">
             <a:spAutoFit/>
           </a:bodyPr>
           <a:lstStyle/>
@@ -8519,9 +8757,9 @@
                 <a:solidFill>
                   <a:srgbClr val="101010"/>
                 </a:solidFill>
-                <a:latin typeface="Helvetica Neue"/>
-              </a:rPr>
-              <a:t>0.45 km^2</a:t>
+                <a:latin typeface="Arial"/>
+              </a:rPr>
+              <a:t>0,45 км^2</a:t>
             </a:r>
           </a:p>
         </p:txBody>
@@ -8543,7 +8781,7 @@
           <a:noFill/>
         </p:spPr>
         <p:txBody>
-          <a:bodyPr wrap="square" lIns="109728" rIns="109728" tIns="73152" bIns="73152" anchor="t">
+          <a:bodyPr wrap="square" lIns="109728" tIns="73152" rIns="109728" bIns="73152" anchor="t">
             <a:spAutoFit/>
           </a:bodyPr>
           <a:lstStyle/>
@@ -8554,9 +8792,9 @@
                 <a:solidFill>
                   <a:srgbClr val="101010"/>
                 </a:solidFill>
-                <a:latin typeface="Helvetica Neue"/>
-              </a:rPr>
-              <a:t>AOI covered (Almaty + Astana)</a:t>
+                <a:latin typeface="Arial"/>
+              </a:rPr>
+              <a:t>покрытие AOI (Алматы + Астана)</a:t>
             </a:r>
           </a:p>
         </p:txBody>
@@ -8612,6 +8850,7 @@
           <a:lstStyle/>
           <a:p>
             <a:pPr algn="ctr"/>
+            <a:endParaRPr/>
           </a:p>
         </p:txBody>
       </p:sp>
@@ -8632,7 +8871,7 @@
           <a:noFill/>
         </p:spPr>
         <p:txBody>
-          <a:bodyPr wrap="square" lIns="109728" rIns="109728" tIns="73152" bIns="73152" anchor="ctr">
+          <a:bodyPr wrap="square" lIns="109728" tIns="73152" rIns="109728" bIns="73152" anchor="ctr">
             <a:spAutoFit/>
           </a:bodyPr>
           <a:lstStyle/>
@@ -8643,7 +8882,7 @@
                 <a:solidFill>
                   <a:srgbClr val="101010"/>
                 </a:solidFill>
-                <a:latin typeface="Helvetica Neue"/>
+                <a:latin typeface="Arial"/>
               </a:rPr>
               <a:t>100%</a:t>
             </a:r>
@@ -8667,7 +8906,7 @@
           <a:noFill/>
         </p:spPr>
         <p:txBody>
-          <a:bodyPr wrap="square" lIns="109728" rIns="109728" tIns="73152" bIns="73152" anchor="t">
+          <a:bodyPr wrap="square" lIns="109728" tIns="73152" rIns="109728" bIns="73152" anchor="t">
             <a:spAutoFit/>
           </a:bodyPr>
           <a:lstStyle/>
@@ -8678,9 +8917,9 @@
                 <a:solidFill>
                   <a:srgbClr val="101010"/>
                 </a:solidFill>
-                <a:latin typeface="Helvetica Neue"/>
-              </a:rPr>
-              <a:t>valid geometries</a:t>
+                <a:latin typeface="Arial"/>
+              </a:rPr>
+              <a:t>валидных геометрий</a:t>
             </a:r>
           </a:p>
         </p:txBody>
@@ -8736,6 +8975,7 @@
           <a:lstStyle/>
           <a:p>
             <a:pPr algn="ctr"/>
+            <a:endParaRPr/>
           </a:p>
         </p:txBody>
       </p:sp>
@@ -8781,6 +9021,7 @@
           <a:lstStyle/>
           <a:p>
             <a:pPr algn="ctr"/>
+            <a:endParaRPr/>
           </a:p>
         </p:txBody>
       </p:sp>
@@ -8801,7 +9042,7 @@
           <a:noFill/>
         </p:spPr>
         <p:txBody>
-          <a:bodyPr wrap="square" lIns="109728" rIns="109728" tIns="73152" bIns="73152" anchor="t">
+          <a:bodyPr wrap="square" lIns="109728" tIns="73152" rIns="109728" bIns="73152" anchor="t">
             <a:spAutoFit/>
           </a:bodyPr>
           <a:lstStyle/>
@@ -8812,9 +9053,9 @@
                 <a:solidFill>
                   <a:srgbClr val="101010"/>
                 </a:solidFill>
-                <a:latin typeface="Helvetica Neue"/>
-              </a:rPr>
-              <a:t>Length &amp; area totals</a:t>
+                <a:latin typeface="Arial"/>
+              </a:rPr>
+              <a:t>Суммы по длине и площади</a:t>
             </a:r>
           </a:p>
         </p:txBody>
@@ -8836,7 +9077,7 @@
           <a:noFill/>
         </p:spPr>
         <p:txBody>
-          <a:bodyPr wrap="square" lIns="164592" rIns="164592" tIns="128016" bIns="128016" anchor="t">
+          <a:bodyPr wrap="square" lIns="164592" tIns="128016" rIns="164592" bIns="128016" anchor="t">
             <a:spAutoFit/>
           </a:bodyPr>
           <a:lstStyle/>
@@ -8851,9 +9092,9 @@
                 <a:solidFill>
                   <a:srgbClr val="101010"/>
                 </a:solidFill>
-                <a:latin typeface="Helvetica Neue"/>
-              </a:rPr>
-              <a:t>Total road length         7,087 m</a:t>
+                <a:latin typeface="Arial"/>
+              </a:rPr>
+              <a:t>Общая длина дорог            7 087 м</a:t>
             </a:r>
           </a:p>
           <a:p>
@@ -8867,9 +9108,9 @@
                 <a:solidFill>
                   <a:srgbClr val="101010"/>
                 </a:solidFill>
-                <a:latin typeface="Helvetica Neue"/>
-              </a:rPr>
-              <a:t>Total built-up area      12,565 m^2</a:t>
+                <a:latin typeface="Arial"/>
+              </a:rPr>
+              <a:t>Общая площадь застройки     12 565 м^2</a:t>
             </a:r>
           </a:p>
           <a:p>
@@ -8883,9 +9124,9 @@
                 <a:solidFill>
                   <a:srgbClr val="101010"/>
                 </a:solidFill>
-                <a:latin typeface="Helvetica Neue"/>
-              </a:rPr>
-              <a:t>Total vegetation area    68,730 m^2</a:t>
+                <a:latin typeface="Arial"/>
+              </a:rPr>
+              <a:t>Общая площадь раст-ти       68 730 м^2</a:t>
             </a:r>
           </a:p>
           <a:p>
@@ -8899,9 +9140,9 @@
                 <a:solidFill>
                   <a:srgbClr val="101010"/>
                 </a:solidFill>
-                <a:latin typeface="Helvetica Neue"/>
-              </a:rPr>
-              <a:t>Total bare-soil area     55,773 m^2</a:t>
+                <a:latin typeface="Arial"/>
+              </a:rPr>
+              <a:t>Общая площадь голой земли   55 773 м^2</a:t>
             </a:r>
           </a:p>
           <a:p>
@@ -8915,9 +9156,9 @@
                 <a:solidFill>
                   <a:srgbClr val="101010"/>
                 </a:solidFill>
-                <a:latin typeface="Helvetica Neue"/>
-              </a:rPr>
-              <a:t>Total water area          5,886 m^2</a:t>
+                <a:latin typeface="Arial"/>
+              </a:rPr>
+              <a:t>Общая площадь воды           5 886 м^2</a:t>
             </a:r>
           </a:p>
         </p:txBody>
@@ -8973,6 +9214,7 @@
           <a:lstStyle/>
           <a:p>
             <a:pPr algn="ctr"/>
+            <a:endParaRPr/>
           </a:p>
         </p:txBody>
       </p:sp>
@@ -8993,7 +9235,7 @@
           <a:noFill/>
         </p:spPr>
         <p:txBody>
-          <a:bodyPr wrap="square" lIns="109728" rIns="109728" tIns="73152" bIns="73152" anchor="t">
+          <a:bodyPr wrap="square" lIns="109728" tIns="73152" rIns="109728" bIns="73152" anchor="t">
             <a:spAutoFit/>
           </a:bodyPr>
           <a:lstStyle/>
@@ -9004,9 +9246,9 @@
                 <a:solidFill>
                   <a:srgbClr val="101010"/>
                 </a:solidFill>
-                <a:latin typeface="Helvetica Neue"/>
-              </a:rPr>
-              <a:t>Confidence floor enforced</a:t>
+                <a:latin typeface="Arial"/>
+              </a:rPr>
+              <a:t>Порог уверенности (confidence)</a:t>
             </a:r>
           </a:p>
         </p:txBody>
@@ -9028,7 +9270,7 @@
           <a:noFill/>
         </p:spPr>
         <p:txBody>
-          <a:bodyPr wrap="square" lIns="164592" rIns="164592" tIns="128016" bIns="128016" anchor="t">
+          <a:bodyPr wrap="square" lIns="164592" tIns="128016" rIns="164592" bIns="128016" anchor="t">
             <a:spAutoFit/>
           </a:bodyPr>
           <a:lstStyle/>
@@ -9043,9 +9285,9 @@
                 <a:solidFill>
                   <a:srgbClr val="101010"/>
                 </a:solidFill>
-                <a:latin typeface="Helvetica Neue"/>
-              </a:rPr>
-              <a:t>vegetation  &gt;= 55       water  &gt;= 60</a:t>
+                <a:latin typeface="Arial"/>
+              </a:rPr>
+              <a:t>растительность  &gt;= 55       вода  &gt;= 60</a:t>
             </a:r>
           </a:p>
           <a:p>
@@ -9059,9 +9301,9 @@
                 <a:solidFill>
                   <a:srgbClr val="101010"/>
                 </a:solidFill>
-                <a:latin typeface="Helvetica Neue"/>
-              </a:rPr>
-              <a:t>built_up    &gt;= 55       bare_soil  &gt;= 50</a:t>
+                <a:latin typeface="Arial"/>
+              </a:rPr>
+              <a:t>застройка       &gt;= 55       голая земля  &gt;= 50</a:t>
             </a:r>
           </a:p>
           <a:p>
@@ -9075,9 +9317,9 @@
                 <a:solidFill>
                   <a:srgbClr val="101010"/>
                 </a:solidFill>
-                <a:latin typeface="Helvetica Neue"/>
-              </a:rPr>
-              <a:t>road        &gt;= 55       building_candidate  &gt;= 55</a:t>
+                <a:latin typeface="Arial"/>
+              </a:rPr>
+              <a:t>дорога          &gt;= 55       здание-кандидат  &gt;= 55</a:t>
             </a:r>
           </a:p>
           <a:p>
@@ -9091,9 +9333,9 @@
                 <a:solidFill>
                   <a:srgbClr val="101010"/>
                 </a:solidFill>
-                <a:latin typeface="Helvetica Neue"/>
-              </a:rPr>
-              <a:t>Below floor -&gt; rejected at merge stage.</a:t>
+                <a:latin typeface="Arial"/>
+              </a:rPr>
+              <a:t>Ниже порога -&gt; объект отбрасывается на этапе слияния.</a:t>
             </a:r>
           </a:p>
         </p:txBody>
@@ -9107,7 +9349,7 @@
         <p:spPr>
           <a:xfrm>
             <a:off x="502920" y="6446520"/>
-            <a:ext cx="7315200" cy="274320"/>
+            <a:ext cx="7315200" cy="286232"/>
           </a:xfrm>
           <a:prstGeom prst="rect">
             <a:avLst/>
@@ -9115,20 +9357,46 @@
           <a:noFill/>
         </p:spPr>
         <p:txBody>
-          <a:bodyPr wrap="square" lIns="109728" rIns="109728" tIns="73152" bIns="73152" anchor="t">
+          <a:bodyPr wrap="square" lIns="109728" tIns="73152" rIns="109728" bIns="73152" anchor="t">
             <a:spAutoFit/>
           </a:bodyPr>
           <a:lstStyle/>
           <a:p>
-            <a:pPr algn="l"/>
-            <a:r>
-              <a:rPr sz="900" b="0">
+            <a:r>
+              <a:rPr lang="ru-RU" sz="900" dirty="0">
                 <a:solidFill>
                   <a:srgbClr val="808080"/>
                 </a:solidFill>
-                <a:latin typeface="Helvetica Neue"/>
-              </a:rPr>
-              <a:t>NURIS Prototype  -  HackNU '26</a:t>
+                <a:latin typeface="Arial"/>
+              </a:rPr>
+              <a:t>Прототип </a:t>
+            </a:r>
+            <a:r>
+              <a:rPr lang="en-US" sz="900" dirty="0">
+                <a:solidFill>
+                  <a:srgbClr val="808080"/>
+                </a:solidFill>
+                <a:latin typeface="Arial"/>
+              </a:rPr>
+              <a:t>NURIS  -  </a:t>
+            </a:r>
+            <a:r>
+              <a:rPr lang="en-US" sz="900" dirty="0" err="1">
+                <a:solidFill>
+                  <a:srgbClr val="808080"/>
+                </a:solidFill>
+                <a:latin typeface="Arial"/>
+              </a:rPr>
+              <a:t>DropOuts</a:t>
+            </a:r>
+            <a:r>
+              <a:rPr lang="en-US" sz="900" dirty="0">
+                <a:solidFill>
+                  <a:srgbClr val="808080"/>
+                </a:solidFill>
+                <a:latin typeface="Arial"/>
+              </a:rPr>
+              <a:t> '26</a:t>
             </a:r>
           </a:p>
         </p:txBody>
@@ -9142,7 +9410,7 @@
 </file>
 
 <file path=ppt/slides/slide8.xml><?xml version="1.0" encoding="utf-8"?>
-<p:sld xmlns:a="http://schemas.openxmlformats.org/drawingml/2006/main" xmlns:p="http://schemas.openxmlformats.org/presentationml/2006/main" xmlns:r="http://schemas.openxmlformats.org/officeDocument/2006/relationships">
+<p:sld xmlns:a="http://schemas.openxmlformats.org/drawingml/2006/main" xmlns:r="http://schemas.openxmlformats.org/officeDocument/2006/relationships" xmlns:p="http://schemas.openxmlformats.org/presentationml/2006/main">
   <p:cSld>
     <p:spTree>
       <p:nvGrpSpPr>
@@ -9150,7 +9418,14 @@
         <p:cNvGrpSpPr/>
         <p:nvPr/>
       </p:nvGrpSpPr>
-      <p:grpSpPr/>
+      <p:grpSpPr>
+        <a:xfrm>
+          <a:off x="0" y="0"/>
+          <a:ext cx="0" cy="0"/>
+          <a:chOff x="0" y="0"/>
+          <a:chExt cx="0" cy="0"/>
+        </a:xfrm>
+      </p:grpSpPr>
       <p:sp>
         <p:nvSpPr>
           <p:cNvPr id="2" name="Rectangle 1"/>
@@ -9192,6 +9467,7 @@
           <a:lstStyle/>
           <a:p>
             <a:pPr algn="ctr"/>
+            <a:endParaRPr/>
           </a:p>
         </p:txBody>
       </p:sp>
@@ -9204,7 +9480,7 @@
         <p:spPr>
           <a:xfrm>
             <a:off x="502920" y="411480"/>
-            <a:ext cx="7315200" cy="502920"/>
+            <a:ext cx="9144000" cy="502920"/>
           </a:xfrm>
           <a:prstGeom prst="rect">
             <a:avLst/>
@@ -9212,7 +9488,7 @@
           <a:noFill/>
         </p:spPr>
         <p:txBody>
-          <a:bodyPr wrap="square" lIns="109728" rIns="109728" tIns="73152" bIns="73152" anchor="ctr">
+          <a:bodyPr wrap="square" lIns="109728" tIns="73152" rIns="109728" bIns="73152" anchor="ctr">
             <a:spAutoFit/>
           </a:bodyPr>
           <a:lstStyle/>
@@ -9223,9 +9499,9 @@
                 <a:solidFill>
                   <a:srgbClr val="101010"/>
                 </a:solidFill>
-                <a:latin typeface="Helvetica Neue"/>
-              </a:rPr>
-              <a:t>QUALITY CHECKS</a:t>
+                <a:latin typeface="Arial"/>
+              </a:rPr>
+              <a:t>КОНТРОЛЬ КАЧЕСТВА</a:t>
             </a:r>
           </a:p>
         </p:txBody>
@@ -9270,6 +9546,7 @@
           <a:lstStyle/>
           <a:p>
             <a:pPr algn="ctr"/>
+            <a:endParaRPr/>
           </a:p>
         </p:txBody>
       </p:sp>
@@ -9311,7 +9588,7 @@
           </a:fontRef>
         </p:style>
         <p:txBody>
-          <a:bodyPr rtlCol="0" anchor="ctr" wrap="square" lIns="109728" rIns="109728" tIns="73152" bIns="73152"/>
+          <a:bodyPr wrap="square" lIns="109728" tIns="73152" rIns="109728" bIns="73152" rtlCol="0" anchor="ctr"/>
           <a:lstStyle/>
           <a:p>
             <a:pPr algn="ctr"/>
@@ -9320,7 +9597,7 @@
                 <a:solidFill>
                   <a:srgbClr val="C8F23E"/>
                 </a:solidFill>
-                <a:latin typeface="Helvetica Neue"/>
+                <a:latin typeface="Arial"/>
               </a:rPr>
               <a:t>08 / 09</a:t>
             </a:r>
@@ -9378,6 +9655,7 @@
           <a:lstStyle/>
           <a:p>
             <a:pPr algn="ctr"/>
+            <a:endParaRPr/>
           </a:p>
         </p:txBody>
       </p:sp>
@@ -9423,6 +9701,7 @@
           <a:lstStyle/>
           <a:p>
             <a:pPr algn="ctr"/>
+            <a:endParaRPr/>
           </a:p>
         </p:txBody>
       </p:sp>
@@ -9443,7 +9722,7 @@
           <a:noFill/>
         </p:spPr>
         <p:txBody>
-          <a:bodyPr wrap="square" lIns="109728" rIns="109728" tIns="73152" bIns="73152" anchor="t">
+          <a:bodyPr wrap="square" lIns="109728" tIns="73152" rIns="109728" bIns="73152" anchor="t">
             <a:spAutoFit/>
           </a:bodyPr>
           <a:lstStyle/>
@@ -9454,9 +9733,9 @@
                 <a:solidFill>
                   <a:srgbClr val="101010"/>
                 </a:solidFill>
-                <a:latin typeface="Helvetica Neue"/>
-              </a:rPr>
-              <a:t>Geometry validity</a:t>
+                <a:latin typeface="Arial"/>
+              </a:rPr>
+              <a:t>Валидность геометрий</a:t>
             </a:r>
           </a:p>
         </p:txBody>
@@ -9478,7 +9757,7 @@
           <a:noFill/>
         </p:spPr>
         <p:txBody>
-          <a:bodyPr wrap="square" lIns="164592" rIns="164592" tIns="128016" bIns="128016" anchor="t">
+          <a:bodyPr wrap="square" lIns="164592" tIns="128016" rIns="164592" bIns="128016" anchor="t">
             <a:spAutoFit/>
           </a:bodyPr>
           <a:lstStyle/>
@@ -9493,9 +9772,9 @@
                 <a:solidFill>
                   <a:srgbClr val="101010"/>
                 </a:solidFill>
-                <a:latin typeface="Helvetica Neue"/>
-              </a:rPr>
-              <a:t>shapely.make_valid on every polygon</a:t>
+                <a:latin typeface="Arial"/>
+              </a:rPr>
+              <a:t>shapely.make_valid для каждого полигона</a:t>
             </a:r>
           </a:p>
           <a:p>
@@ -9509,9 +9788,9 @@
                 <a:solidFill>
                   <a:srgbClr val="101010"/>
                 </a:solidFill>
-                <a:latin typeface="Helvetica Neue"/>
-              </a:rPr>
-              <a:t>RHR winding via shapely.ops.orient</a:t>
+                <a:latin typeface="Arial"/>
+              </a:rPr>
+              <a:t>Обход RHR через shapely.ops.orient</a:t>
             </a:r>
           </a:p>
           <a:p>
@@ -9525,9 +9804,9 @@
                 <a:solidFill>
                   <a:srgbClr val="101010"/>
                 </a:solidFill>
-                <a:latin typeface="Helvetica Neue"/>
-              </a:rPr>
-              <a:t>100% of exported features pass is_valid</a:t>
+                <a:latin typeface="Arial"/>
+              </a:rPr>
+              <a:t>100% объектов проходят is_valid</a:t>
             </a:r>
           </a:p>
         </p:txBody>
@@ -9583,6 +9862,7 @@
           <a:lstStyle/>
           <a:p>
             <a:pPr algn="ctr"/>
+            <a:endParaRPr/>
           </a:p>
         </p:txBody>
       </p:sp>
@@ -9603,7 +9883,7 @@
           <a:noFill/>
         </p:spPr>
         <p:txBody>
-          <a:bodyPr wrap="square" lIns="109728" rIns="109728" tIns="73152" bIns="73152" anchor="t">
+          <a:bodyPr wrap="square" lIns="109728" tIns="73152" rIns="109728" bIns="73152" anchor="t">
             <a:spAutoFit/>
           </a:bodyPr>
           <a:lstStyle/>
@@ -9614,9 +9894,9 @@
                 <a:solidFill>
                   <a:srgbClr val="101010"/>
                 </a:solidFill>
-                <a:latin typeface="Helvetica Neue"/>
-              </a:rPr>
-              <a:t>Spec compliance</a:t>
+                <a:latin typeface="Arial"/>
+              </a:rPr>
+              <a:t>Соответствие стандартам</a:t>
             </a:r>
           </a:p>
         </p:txBody>
@@ -9638,7 +9918,7 @@
           <a:noFill/>
         </p:spPr>
         <p:txBody>
-          <a:bodyPr wrap="square" lIns="164592" rIns="164592" tIns="128016" bIns="128016" anchor="t">
+          <a:bodyPr wrap="square" lIns="164592" tIns="128016" rIns="164592" bIns="128016" anchor="t">
             <a:spAutoFit/>
           </a:bodyPr>
           <a:lstStyle/>
@@ -9653,9 +9933,9 @@
                 <a:solidFill>
                   <a:srgbClr val="101010"/>
                 </a:solidFill>
-                <a:latin typeface="Helvetica Neue"/>
-              </a:rPr>
-              <a:t>GeoJSON: RFC 7946 (no crs member, EPSG:4326)</a:t>
+                <a:latin typeface="Arial"/>
+              </a:rPr>
+              <a:t>GeoJSON: RFC 7946 (без поля crs, EPSG:4326)</a:t>
             </a:r>
           </a:p>
           <a:p>
@@ -9669,9 +9949,9 @@
                 <a:solidFill>
                   <a:srgbClr val="101010"/>
                 </a:solidFill>
-                <a:latin typeface="Helvetica Neue"/>
-              </a:rPr>
-              <a:t>Coordinates quantized to 7 decimals</a:t>
+                <a:latin typeface="Arial"/>
+              </a:rPr>
+              <a:t>Координаты округлены до 7 знаков</a:t>
             </a:r>
           </a:p>
           <a:p>
@@ -9685,9 +9965,9 @@
                 <a:solidFill>
                   <a:srgbClr val="101010"/>
                 </a:solidFill>
-                <a:latin typeface="Helvetica Neue"/>
-              </a:rPr>
-              <a:t>GeoPackage: layered by geom type</a:t>
+                <a:latin typeface="Arial"/>
+              </a:rPr>
+              <a:t>GeoPackage: слои по типу геометрии</a:t>
             </a:r>
           </a:p>
         </p:txBody>
@@ -9743,6 +10023,7 @@
           <a:lstStyle/>
           <a:p>
             <a:pPr algn="ctr"/>
+            <a:endParaRPr/>
           </a:p>
         </p:txBody>
       </p:sp>
@@ -9763,7 +10044,7 @@
           <a:noFill/>
         </p:spPr>
         <p:txBody>
-          <a:bodyPr wrap="square" lIns="109728" rIns="109728" tIns="73152" bIns="73152" anchor="t">
+          <a:bodyPr wrap="square" lIns="109728" tIns="73152" rIns="109728" bIns="73152" anchor="t">
             <a:spAutoFit/>
           </a:bodyPr>
           <a:lstStyle/>
@@ -9774,9 +10055,9 @@
                 <a:solidFill>
                   <a:srgbClr val="101010"/>
                 </a:solidFill>
-                <a:latin typeface="Helvetica Neue"/>
-              </a:rPr>
-              <a:t>Spatial alignment</a:t>
+                <a:latin typeface="Arial"/>
+              </a:rPr>
+              <a:t>Привязка к снимку</a:t>
             </a:r>
           </a:p>
         </p:txBody>
@@ -9798,7 +10079,7 @@
           <a:noFill/>
         </p:spPr>
         <p:txBody>
-          <a:bodyPr wrap="square" lIns="164592" rIns="164592" tIns="128016" bIns="128016" anchor="t">
+          <a:bodyPr wrap="square" lIns="164592" tIns="128016" rIns="164592" bIns="128016" anchor="t">
             <a:spAutoFit/>
           </a:bodyPr>
           <a:lstStyle/>
@@ -9813,9 +10094,9 @@
                 <a:solidFill>
                   <a:srgbClr val="101010"/>
                 </a:solidFill>
-                <a:latin typeface="Helvetica Neue"/>
-              </a:rPr>
-              <a:t>Output bounding box subset of source raster bounds.</a:t>
+                <a:latin typeface="Arial"/>
+              </a:rPr>
+              <a:t>Bounding box выходов внутри границ исходного растра.</a:t>
             </a:r>
           </a:p>
           <a:p>
@@ -9829,9 +10110,9 @@
                 <a:solidFill>
                   <a:srgbClr val="101010"/>
                 </a:solidFill>
-                <a:latin typeface="Helvetica Neue"/>
-              </a:rPr>
-              <a:t>Tile overlap dissolved via unary_union per class.</a:t>
+                <a:latin typeface="Arial"/>
+              </a:rPr>
+              <a:t>Перекрытия плиток сливаются через unary_union.</a:t>
             </a:r>
           </a:p>
           <a:p>
@@ -9845,9 +10126,9 @@
                 <a:solidFill>
                   <a:srgbClr val="101010"/>
                 </a:solidFill>
-                <a:latin typeface="Helvetica Neue"/>
-              </a:rPr>
-              <a:t>Metric calculations in scene-local UTM zone.</a:t>
+                <a:latin typeface="Arial"/>
+              </a:rPr>
+              <a:t>Метрические расчёты — в локальной UTM-зоне.</a:t>
             </a:r>
           </a:p>
         </p:txBody>
@@ -9903,6 +10184,7 @@
           <a:lstStyle/>
           <a:p>
             <a:pPr algn="ctr"/>
+            <a:endParaRPr/>
           </a:p>
         </p:txBody>
       </p:sp>
@@ -9923,7 +10205,7 @@
           <a:noFill/>
         </p:spPr>
         <p:txBody>
-          <a:bodyPr wrap="square" lIns="109728" rIns="109728" tIns="73152" bIns="73152" anchor="t">
+          <a:bodyPr wrap="square" lIns="109728" tIns="73152" rIns="109728" bIns="73152" anchor="t">
             <a:spAutoFit/>
           </a:bodyPr>
           <a:lstStyle/>
@@ -9934,9 +10216,9 @@
                 <a:solidFill>
                   <a:srgbClr val="101010"/>
                 </a:solidFill>
-                <a:latin typeface="Helvetica Neue"/>
-              </a:rPr>
-              <a:t>Sample-tile control (Almaty_10)</a:t>
+                <a:latin typeface="Arial"/>
+              </a:rPr>
+              <a:t>Контрольная плитка (Алматы_10)</a:t>
             </a:r>
           </a:p>
         </p:txBody>
@@ -9958,7 +10240,7 @@
           <a:noFill/>
         </p:spPr>
         <p:txBody>
-          <a:bodyPr wrap="square" lIns="164592" rIns="164592" tIns="128016" bIns="128016" anchor="t">
+          <a:bodyPr wrap="square" lIns="164592" tIns="128016" rIns="164592" bIns="128016" anchor="t">
             <a:spAutoFit/>
           </a:bodyPr>
           <a:lstStyle/>
@@ -9973,9 +10255,9 @@
                 <a:solidFill>
                   <a:srgbClr val="101010"/>
                 </a:solidFill>
-                <a:latin typeface="Helvetica Neue"/>
-              </a:rPr>
-              <a:t>vegetation       precision ~ 0.86   recall ~ 0.78</a:t>
+                <a:latin typeface="Arial"/>
+              </a:rPr>
+              <a:t>растительность  precision ~ 0,86   recall ~ 0,78</a:t>
             </a:r>
           </a:p>
           <a:p>
@@ -9989,9 +10271,9 @@
                 <a:solidFill>
                   <a:srgbClr val="101010"/>
                 </a:solidFill>
-                <a:latin typeface="Helvetica Neue"/>
-              </a:rPr>
-              <a:t>built_up         precision ~ 0.74   recall ~ 0.69</a:t>
+                <a:latin typeface="Arial"/>
+              </a:rPr>
+              <a:t>застройка       precision ~ 0,74   recall ~ 0,69</a:t>
             </a:r>
           </a:p>
           <a:p>
@@ -10005,9 +10287,9 @@
                 <a:solidFill>
                   <a:srgbClr val="101010"/>
                 </a:solidFill>
-                <a:latin typeface="Helvetica Neue"/>
-              </a:rPr>
-              <a:t>water            precision ~ 0.81   recall ~ 0.70</a:t>
+                <a:latin typeface="Arial"/>
+              </a:rPr>
+              <a:t>вода            precision ~ 0,81   recall ~ 0,70</a:t>
             </a:r>
           </a:p>
           <a:p>
@@ -10021,9 +10303,9 @@
                 <a:solidFill>
                   <a:srgbClr val="101010"/>
                 </a:solidFill>
-                <a:latin typeface="Helvetica Neue"/>
-              </a:rPr>
-              <a:t>road centerline  IoU buffer-2m ~ 0.55</a:t>
+                <a:latin typeface="Arial"/>
+              </a:rPr>
+              <a:t>осевая дороги   IoU @ 2 м ~ 0,55</a:t>
             </a:r>
           </a:p>
         </p:txBody>
@@ -10037,7 +10319,7 @@
         <p:spPr>
           <a:xfrm>
             <a:off x="502920" y="6446520"/>
-            <a:ext cx="7315200" cy="274320"/>
+            <a:ext cx="7315200" cy="286232"/>
           </a:xfrm>
           <a:prstGeom prst="rect">
             <a:avLst/>
@@ -10045,20 +10327,46 @@
           <a:noFill/>
         </p:spPr>
         <p:txBody>
-          <a:bodyPr wrap="square" lIns="109728" rIns="109728" tIns="73152" bIns="73152" anchor="t">
+          <a:bodyPr wrap="square" lIns="109728" tIns="73152" rIns="109728" bIns="73152" anchor="t">
             <a:spAutoFit/>
           </a:bodyPr>
           <a:lstStyle/>
           <a:p>
-            <a:pPr algn="l"/>
-            <a:r>
-              <a:rPr sz="900" b="0">
+            <a:r>
+              <a:rPr lang="ru-RU" sz="900" dirty="0">
                 <a:solidFill>
                   <a:srgbClr val="808080"/>
                 </a:solidFill>
-                <a:latin typeface="Helvetica Neue"/>
-              </a:rPr>
-              <a:t>NURIS Prototype  -  HackNU '26</a:t>
+                <a:latin typeface="Arial"/>
+              </a:rPr>
+              <a:t>Прототип </a:t>
+            </a:r>
+            <a:r>
+              <a:rPr lang="en-US" sz="900" dirty="0">
+                <a:solidFill>
+                  <a:srgbClr val="808080"/>
+                </a:solidFill>
+                <a:latin typeface="Arial"/>
+              </a:rPr>
+              <a:t>NURIS  -  </a:t>
+            </a:r>
+            <a:r>
+              <a:rPr lang="en-US" sz="900" dirty="0" err="1">
+                <a:solidFill>
+                  <a:srgbClr val="808080"/>
+                </a:solidFill>
+                <a:latin typeface="Arial"/>
+              </a:rPr>
+              <a:t>DropOuts</a:t>
+            </a:r>
+            <a:r>
+              <a:rPr lang="en-US" sz="900" dirty="0">
+                <a:solidFill>
+                  <a:srgbClr val="808080"/>
+                </a:solidFill>
+                <a:latin typeface="Arial"/>
+              </a:rPr>
+              <a:t> '26</a:t>
             </a:r>
           </a:p>
         </p:txBody>
@@ -10072,7 +10380,7 @@
 </file>
 
 <file path=ppt/slides/slide9.xml><?xml version="1.0" encoding="utf-8"?>
-<p:sld xmlns:a="http://schemas.openxmlformats.org/drawingml/2006/main" xmlns:p="http://schemas.openxmlformats.org/presentationml/2006/main" xmlns:r="http://schemas.openxmlformats.org/officeDocument/2006/relationships">
+<p:sld xmlns:a="http://schemas.openxmlformats.org/drawingml/2006/main" xmlns:r="http://schemas.openxmlformats.org/officeDocument/2006/relationships" xmlns:p="http://schemas.openxmlformats.org/presentationml/2006/main">
   <p:cSld>
     <p:spTree>
       <p:nvGrpSpPr>
@@ -10080,7 +10388,14 @@
         <p:cNvGrpSpPr/>
         <p:nvPr/>
       </p:nvGrpSpPr>
-      <p:grpSpPr/>
+      <p:grpSpPr>
+        <a:xfrm>
+          <a:off x="0" y="0"/>
+          <a:ext cx="0" cy="0"/>
+          <a:chOff x="0" y="0"/>
+          <a:chExt cx="0" cy="0"/>
+        </a:xfrm>
+      </p:grpSpPr>
       <p:sp>
         <p:nvSpPr>
           <p:cNvPr id="2" name="Rectangle 1"/>
@@ -10122,6 +10437,7 @@
           <a:lstStyle/>
           <a:p>
             <a:pPr algn="ctr"/>
+            <a:endParaRPr/>
           </a:p>
         </p:txBody>
       </p:sp>
@@ -10134,7 +10450,7 @@
         <p:spPr>
           <a:xfrm>
             <a:off x="502920" y="411480"/>
-            <a:ext cx="7315200" cy="502920"/>
+            <a:ext cx="9144000" cy="502920"/>
           </a:xfrm>
           <a:prstGeom prst="rect">
             <a:avLst/>
@@ -10142,7 +10458,7 @@
           <a:noFill/>
         </p:spPr>
         <p:txBody>
-          <a:bodyPr wrap="square" lIns="109728" rIns="109728" tIns="73152" bIns="73152" anchor="ctr">
+          <a:bodyPr wrap="square" lIns="109728" tIns="73152" rIns="109728" bIns="73152" anchor="ctr">
             <a:spAutoFit/>
           </a:bodyPr>
           <a:lstStyle/>
@@ -10153,9 +10469,9 @@
                 <a:solidFill>
                   <a:srgbClr val="101010"/>
                 </a:solidFill>
-                <a:latin typeface="Helvetica Neue"/>
-              </a:rPr>
-              <a:t>LIMITATIONS  &amp;  HOW TO RUN</a:t>
+                <a:latin typeface="Arial"/>
+              </a:rPr>
+              <a:t>ОГРАНИЧЕНИЯ  &amp;  КАК ЗАПУСТИТЬ</a:t>
             </a:r>
           </a:p>
         </p:txBody>
@@ -10200,6 +10516,7 @@
           <a:lstStyle/>
           <a:p>
             <a:pPr algn="ctr"/>
+            <a:endParaRPr/>
           </a:p>
         </p:txBody>
       </p:sp>
@@ -10241,7 +10558,7 @@
           </a:fontRef>
         </p:style>
         <p:txBody>
-          <a:bodyPr rtlCol="0" anchor="ctr" wrap="square" lIns="109728" rIns="109728" tIns="73152" bIns="73152"/>
+          <a:bodyPr wrap="square" lIns="109728" tIns="73152" rIns="109728" bIns="73152" rtlCol="0" anchor="ctr"/>
           <a:lstStyle/>
           <a:p>
             <a:pPr algn="ctr"/>
@@ -10250,7 +10567,7 @@
                 <a:solidFill>
                   <a:srgbClr val="C8F23E"/>
                 </a:solidFill>
-                <a:latin typeface="Helvetica Neue"/>
+                <a:latin typeface="Arial"/>
               </a:rPr>
               <a:t>09 / 09</a:t>
             </a:r>
@@ -10308,6 +10625,7 @@
           <a:lstStyle/>
           <a:p>
             <a:pPr algn="ctr"/>
+            <a:endParaRPr/>
           </a:p>
         </p:txBody>
       </p:sp>
@@ -10328,7 +10646,7 @@
           <a:noFill/>
         </p:spPr>
         <p:txBody>
-          <a:bodyPr wrap="square" lIns="109728" rIns="109728" tIns="73152" bIns="73152" anchor="t">
+          <a:bodyPr wrap="square" lIns="109728" tIns="73152" rIns="109728" bIns="73152" anchor="t">
             <a:spAutoFit/>
           </a:bodyPr>
           <a:lstStyle/>
@@ -10339,9 +10657,9 @@
                 <a:solidFill>
                   <a:srgbClr val="101010"/>
                 </a:solidFill>
-                <a:latin typeface="Helvetica Neue"/>
-              </a:rPr>
-              <a:t>Known limitations</a:t>
+                <a:latin typeface="Arial"/>
+              </a:rPr>
+              <a:t>Известные ограничения</a:t>
             </a:r>
           </a:p>
         </p:txBody>
@@ -10363,7 +10681,7 @@
           <a:noFill/>
         </p:spPr>
         <p:txBody>
-          <a:bodyPr wrap="square" lIns="164592" rIns="164592" tIns="128016" bIns="128016" anchor="t">
+          <a:bodyPr wrap="square" lIns="164592" tIns="128016" rIns="164592" bIns="128016" anchor="t">
             <a:spAutoFit/>
           </a:bodyPr>
           <a:lstStyle/>
@@ -10378,9 +10696,9 @@
                 <a:solidFill>
                   <a:srgbClr val="101010"/>
                 </a:solidFill>
-                <a:latin typeface="Helvetica Neue"/>
-              </a:rPr>
-              <a:t>- RGB only; no NIR -&gt; harder to separate water from</a:t>
+                <a:latin typeface="Arial"/>
+              </a:rPr>
+              <a:t>- Только RGB; без NIR трудно отделить воду</a:t>
             </a:r>
           </a:p>
           <a:p>
@@ -10394,9 +10712,9 @@
                 <a:solidFill>
                   <a:srgbClr val="101010"/>
                 </a:solidFill>
-                <a:latin typeface="Helvetica Neue"/>
-              </a:rPr>
-              <a:t>  shadow under heavy cloud or dense canopy.</a:t>
+                <a:latin typeface="Arial"/>
+              </a:rPr>
+              <a:t>  от тени под облачностью или плотной кроной.</a:t>
             </a:r>
           </a:p>
           <a:p>
@@ -10410,9 +10728,9 @@
                 <a:solidFill>
                   <a:srgbClr val="101010"/>
                 </a:solidFill>
-                <a:latin typeface="Helvetica Neue"/>
-              </a:rPr>
-              <a:t>- Building candidates inherit polygon compactness;</a:t>
+                <a:latin typeface="Arial"/>
+              </a:rPr>
+              <a:t>- Здания-кандидаты используют компактность полигона;</a:t>
             </a:r>
           </a:p>
           <a:p>
@@ -10426,9 +10744,9 @@
                 <a:solidFill>
                   <a:srgbClr val="101010"/>
                 </a:solidFill>
-                <a:latin typeface="Helvetica Neue"/>
-              </a:rPr>
-              <a:t>  attached buildings may merge.</a:t>
+                <a:latin typeface="Arial"/>
+              </a:rPr>
+              <a:t>  сросшиеся здания могут слипаться.</a:t>
             </a:r>
           </a:p>
           <a:p>
@@ -10442,9 +10760,9 @@
                 <a:solidFill>
                   <a:srgbClr val="101010"/>
                 </a:solidFill>
-                <a:latin typeface="Helvetica Neue"/>
-              </a:rPr>
-              <a:t>- Roads come from a built-up skeleton heuristic;</a:t>
+                <a:latin typeface="Arial"/>
+              </a:rPr>
+              <a:t>- Дороги — эвристика по скелету застройки,</a:t>
             </a:r>
           </a:p>
           <a:p>
@@ -10458,9 +10776,9 @@
                 <a:solidFill>
                   <a:srgbClr val="101010"/>
                 </a:solidFill>
-                <a:latin typeface="Helvetica Neue"/>
-              </a:rPr>
-              <a:t>  not a learned road detector.</a:t>
+                <a:latin typeface="Arial"/>
+              </a:rPr>
+              <a:t>  а не специализированный детектор дорог.</a:t>
             </a:r>
           </a:p>
           <a:p>
@@ -10474,9 +10792,9 @@
                 <a:solidFill>
                   <a:srgbClr val="101010"/>
                 </a:solidFill>
-                <a:latin typeface="Helvetica Neue"/>
-              </a:rPr>
-              <a:t>- Confidences are rule-based proxies, not calibrated.</a:t>
+                <a:latin typeface="Arial"/>
+              </a:rPr>
+              <a:t>- Confidence — эвристический прокси, не калиброван.</a:t>
             </a:r>
           </a:p>
         </p:txBody>
@@ -10532,6 +10850,7 @@
           <a:lstStyle/>
           <a:p>
             <a:pPr algn="ctr"/>
+            <a:endParaRPr/>
           </a:p>
         </p:txBody>
       </p:sp>
@@ -10552,7 +10871,7 @@
           <a:noFill/>
         </p:spPr>
         <p:txBody>
-          <a:bodyPr wrap="square" lIns="109728" rIns="109728" tIns="73152" bIns="73152" anchor="t">
+          <a:bodyPr wrap="square" lIns="109728" tIns="73152" rIns="109728" bIns="73152" anchor="t">
             <a:spAutoFit/>
           </a:bodyPr>
           <a:lstStyle/>
@@ -10563,9 +10882,9 @@
                 <a:solidFill>
                   <a:srgbClr val="101010"/>
                 </a:solidFill>
-                <a:latin typeface="Helvetica Neue"/>
-              </a:rPr>
-              <a:t>Reproduce in 2 commands</a:t>
+                <a:latin typeface="Arial"/>
+              </a:rPr>
+              <a:t>Запуск двумя командами</a:t>
             </a:r>
           </a:p>
         </p:txBody>
@@ -10587,7 +10906,7 @@
           <a:noFill/>
         </p:spPr>
         <p:txBody>
-          <a:bodyPr wrap="square" lIns="164592" rIns="164592" tIns="128016" bIns="128016" anchor="t">
+          <a:bodyPr wrap="square" lIns="164592" tIns="128016" rIns="164592" bIns="128016" anchor="t">
             <a:spAutoFit/>
           </a:bodyPr>
           <a:lstStyle/>
@@ -10602,7 +10921,7 @@
                 <a:solidFill>
                   <a:srgbClr val="101010"/>
                 </a:solidFill>
-                <a:latin typeface="Helvetica Neue"/>
+                <a:latin typeface="Arial"/>
               </a:rPr>
               <a:t>pip install -r requirements.txt</a:t>
             </a:r>
@@ -10618,7 +10937,7 @@
                 <a:solidFill>
                   <a:srgbClr val="101010"/>
                 </a:solidFill>
-                <a:latin typeface="Helvetica Neue"/>
+                <a:latin typeface="Arial"/>
               </a:rPr>
               <a:t>python run.py --inputs Almaty/ Astana/  --out outputs/</a:t>
             </a:r>
@@ -10676,6 +10995,7 @@
           <a:lstStyle/>
           <a:p>
             <a:pPr algn="ctr"/>
+            <a:endParaRPr/>
           </a:p>
         </p:txBody>
       </p:sp>
@@ -10721,6 +11041,7 @@
           <a:lstStyle/>
           <a:p>
             <a:pPr algn="ctr"/>
+            <a:endParaRPr/>
           </a:p>
         </p:txBody>
       </p:sp>
@@ -10741,7 +11062,7 @@
           <a:noFill/>
         </p:spPr>
         <p:txBody>
-          <a:bodyPr wrap="square" lIns="109728" rIns="109728" tIns="73152" bIns="73152" anchor="t">
+          <a:bodyPr wrap="square" lIns="109728" tIns="73152" rIns="109728" bIns="73152" anchor="t">
             <a:spAutoFit/>
           </a:bodyPr>
           <a:lstStyle/>
@@ -10752,9 +11073,9 @@
                 <a:solidFill>
                   <a:srgbClr val="101010"/>
                 </a:solidFill>
-                <a:latin typeface="Helvetica Neue"/>
-              </a:rPr>
-              <a:t>Repo layout</a:t>
+                <a:latin typeface="Arial"/>
+              </a:rPr>
+              <a:t>Структура репозитория</a:t>
             </a:r>
           </a:p>
         </p:txBody>
@@ -10776,7 +11097,7 @@
           <a:noFill/>
         </p:spPr>
         <p:txBody>
-          <a:bodyPr wrap="square" lIns="164592" rIns="164592" tIns="128016" bIns="128016" anchor="t">
+          <a:bodyPr wrap="square" lIns="164592" tIns="128016" rIns="164592" bIns="128016" anchor="t">
             <a:spAutoFit/>
           </a:bodyPr>
           <a:lstStyle/>
@@ -10791,7 +11112,7 @@
                 <a:solidFill>
                   <a:srgbClr val="101010"/>
                 </a:solidFill>
-                <a:latin typeface="Helvetica Neue"/>
+                <a:latin typeface="Arial"/>
               </a:rPr>
               <a:t>src/nuris/   tiling, classify, vectorize,</a:t>
             </a:r>
@@ -10807,7 +11128,7 @@
                 <a:solidFill>
                   <a:srgbClr val="101010"/>
                 </a:solidFill>
-                <a:latin typeface="Helvetica Neue"/>
+                <a:latin typeface="Arial"/>
               </a:rPr>
               <a:t>             postprocess, export, stats</a:t>
             </a:r>
@@ -10823,9 +11144,9 @@
                 <a:solidFill>
                   <a:srgbClr val="101010"/>
                 </a:solidFill>
-                <a:latin typeface="Helvetica Neue"/>
-              </a:rPr>
-              <a:t>run.py       CLI entry-point</a:t>
+                <a:latin typeface="Arial"/>
+              </a:rPr>
+              <a:t>run.py       CLI-точка входа</a:t>
             </a:r>
           </a:p>
           <a:p>
@@ -10839,9 +11160,9 @@
                 <a:solidFill>
                   <a:srgbClr val="101010"/>
                 </a:solidFill>
-                <a:latin typeface="Helvetica Neue"/>
-              </a:rPr>
-              <a:t>visualize.py overlay PNG renderer</a:t>
+                <a:latin typeface="Arial"/>
+              </a:rPr>
+              <a:t>visualize.py рендер PNG-превью</a:t>
             </a:r>
           </a:p>
           <a:p>
@@ -10855,7 +11176,7 @@
                 <a:solidFill>
                   <a:srgbClr val="101010"/>
                 </a:solidFill>
-                <a:latin typeface="Helvetica Neue"/>
+                <a:latin typeface="Arial"/>
               </a:rPr>
               <a:t>outputs/     .geojson  .gpkg  .png  summary.csv</a:t>
             </a:r>
@@ -10871,7 +11192,7 @@
         <p:spPr>
           <a:xfrm>
             <a:off x="502920" y="6446520"/>
-            <a:ext cx="7315200" cy="274320"/>
+            <a:ext cx="7315200" cy="286232"/>
           </a:xfrm>
           <a:prstGeom prst="rect">
             <a:avLst/>
@@ -10879,20 +11200,46 @@
           <a:noFill/>
         </p:spPr>
         <p:txBody>
-          <a:bodyPr wrap="square" lIns="109728" rIns="109728" tIns="73152" bIns="73152" anchor="t">
+          <a:bodyPr wrap="square" lIns="109728" tIns="73152" rIns="109728" bIns="73152" anchor="t">
             <a:spAutoFit/>
           </a:bodyPr>
           <a:lstStyle/>
           <a:p>
-            <a:pPr algn="l"/>
-            <a:r>
-              <a:rPr sz="900" b="0">
+            <a:r>
+              <a:rPr lang="ru-RU" sz="900" dirty="0">
                 <a:solidFill>
                   <a:srgbClr val="808080"/>
                 </a:solidFill>
-                <a:latin typeface="Helvetica Neue"/>
-              </a:rPr>
-              <a:t>NURIS Prototype  -  HackNU '26</a:t>
+                <a:latin typeface="Arial"/>
+              </a:rPr>
+              <a:t>Прототип </a:t>
+            </a:r>
+            <a:r>
+              <a:rPr lang="en-US" sz="900" dirty="0">
+                <a:solidFill>
+                  <a:srgbClr val="808080"/>
+                </a:solidFill>
+                <a:latin typeface="Arial"/>
+              </a:rPr>
+              <a:t>NURIS  -  </a:t>
+            </a:r>
+            <a:r>
+              <a:rPr lang="en-US" sz="900" dirty="0" err="1">
+                <a:solidFill>
+                  <a:srgbClr val="808080"/>
+                </a:solidFill>
+                <a:latin typeface="Arial"/>
+              </a:rPr>
+              <a:t>DropOuts</a:t>
+            </a:r>
+            <a:r>
+              <a:rPr lang="en-US" sz="900" dirty="0">
+                <a:solidFill>
+                  <a:srgbClr val="808080"/>
+                </a:solidFill>
+                <a:latin typeface="Arial"/>
+              </a:rPr>
+              <a:t> '26</a:t>
             </a:r>
           </a:p>
         </p:txBody>
